--- a/it/slides/11-Architettura_dei_Calcolatori-Macchine_Combinatorie-Codice.pptx
+++ b/it/slides/11-Architettura_dei_Calcolatori-Macchine_Combinatorie-Codice.pptx
@@ -122,29 +122,45 @@
   <p:extLst>
     <p:ext uri="{521415D9-36F7-43E2-AB2F-B90AF26B5E84}">
       <p14:sectionLst xmlns:p14="http://schemas.microsoft.com/office/powerpoint/2010/main">
-        <p14:section name="Apertura" id="{69eede05-9e64-f0e3-6b00-1b4a5f7e52b2}">
+        <p14:section name="Apertura" id="{998af627-b064-3215-d22e-d949f8bd1e2e}">
           <p14:sldIdLst>
             <p14:sldId id="256"/>
             <p14:sldId id="257"/>
           </p14:sldIdLst>
         </p14:section>
-        <p14:section name="I listati" id="{60eb370c-b7b9-5ca1-642c-16effe30c9d2}">
+        <p14:section name="Riscaldamento sulla macchina" id="{08e11e9c-ee39-de51-30c9-25207687deec}">
           <p14:sldIdLst>
             <p14:sldId id="258"/>
+          </p14:sldIdLst>
+        </p14:section>
+        <p14:section name="Decodificatori e codificatori" id="{49631a73-2fb0-5658-1e75-0589a62fdec6}">
+          <p14:sldIdLst>
             <p14:sldId id="259"/>
+          </p14:sldIdLst>
+        </p14:section>
+        <p14:section name="Multiplexer e demultiplexer" id="{875188ce-936f-fabc-c53c-dd640123bbf8}">
+          <p14:sldIdLst>
             <p14:sldId id="260"/>
+          </p14:sldIdLst>
+        </p14:section>
+        <p14:section name="Confrontare e controllare" id="{fc334173-5c63-79dc-4f25-d7a3f427978c}">
+          <p14:sldIdLst>
             <p14:sldId id="261"/>
+          </p14:sldIdLst>
+        </p14:section>
+        <p14:section name="L'unità aritmetico-logica" id="{4fe351bc-cccf-3cc0-b89c-94346eb43389}">
+          <p14:sldIdLst>
             <p14:sldId id="262"/>
           </p14:sldIdLst>
         </p14:section>
-        <p14:section name="Il programma completo" id="{045c14a9-0091-0814-aa05-6c747e79aae5}">
+        <p14:section name="Il programma completo" id="{c40ecae2-da84-f561-a994-5ad233ae37ef}">
           <p14:sldIdLst>
             <p14:sldId id="263"/>
             <p14:sldId id="264"/>
             <p14:sldId id="265"/>
           </p14:sldIdLst>
         </p14:section>
-        <p14:section name="Eseguire e provare" id="{4320b931-4e1c-0ade-baac-79ae892ad4fb}">
+        <p14:section name="Eseguire e provare" id="{3fd0e9b6-06aa-f9d4-6389-911ef8cdb8e5}">
           <p14:sldIdLst>
             <p14:sldId id="266"/>
             <p14:sldId id="267"/>
@@ -153,7 +169,7 @@
             <p14:sldId id="270"/>
           </p14:sldIdLst>
         </p14:section>
-        <p14:section name="Esercizi" id="{1bd3826b-4b8b-5da5-97ab-5937e399bf98}">
+        <p14:section name="Esercizi" id="{2fa44aaa-ffa1-74b7-e842-8812bb9c8439}">
           <p14:sldIdLst>
             <p14:sldId id="271"/>
           </p14:sldIdLst>
@@ -2871,7 +2887,63 @@
       </p:sp>
       <p:sp>
         <p:nvSpPr>
-          <p:cNvPr id="11" name="Shape 9"/>
+          <p:cNvPr id="11" name="Text 9"/>
+          <p:cNvSpPr txBox="1"/>
+          <p:nvPr/>
+        </p:nvSpPr>
+        <p:spPr>
+          <a:xfrm>
+            <a:off x="4693615" y="566928"/>
+            <a:ext cx="6949440" cy="640080"/>
+          </a:xfrm>
+          <a:prstGeom prst="rect">
+            <a:avLst/>
+          </a:prstGeom>
+          <a:noFill/>
+          <a:ln/>
+        </p:spPr>
+        <p:txBody>
+          <a:bodyPr wrap="square" lIns="0" tIns="0" rIns="0" bIns="0" rtlCol="0" anchor="t"/>
+          <a:lstStyle/>
+          <a:p>
+            <a:pPr algn="r" indent="0" marL="0">
+              <a:buNone/>
+            </a:pPr>
+            <a:r>
+              <a:rPr lang="en-US" sz="1300" dirty="0">
+                <a:solidFill>
+                  <a:srgbClr val="CFE3EA"/>
+                </a:solidFill>
+                <a:latin typeface="Calibri" pitchFamily="34" charset="0"/>
+                <a:ea typeface="Calibri" pitchFamily="34" charset="-122"/>
+                <a:cs typeface="Calibri" pitchFamily="34" charset="-120"/>
+              </a:rPr>
+              <a:t>Presentazione del codice. I concetti, le figure e le domande sono nella presentazione della lezione:</a:t>
+            </a:r>
+            <a:endParaRPr lang="en-US" sz="1300" dirty="0"/>
+          </a:p>
+          <a:p>
+            <a:pPr algn="r" indent="0" marL="0">
+              <a:buNone/>
+            </a:pPr>
+            <a:r>
+              <a:rPr lang="en-US" sz="1300" dirty="0">
+                <a:solidFill>
+                  <a:srgbClr val="CFE3EA"/>
+                </a:solidFill>
+                <a:latin typeface="Calibri" pitchFamily="34" charset="0"/>
+                <a:ea typeface="Calibri" pitchFamily="34" charset="-122"/>
+                <a:cs typeface="Calibri" pitchFamily="34" charset="-120"/>
+              </a:rPr>
+              <a:t>11-Architettura_dei_Calcolatori-Macchine_Combinatorie.pptx</a:t>
+            </a:r>
+            <a:endParaRPr lang="en-US" sz="1300" dirty="0"/>
+          </a:p>
+        </p:txBody>
+      </p:sp>
+      <p:sp>
+        <p:nvSpPr>
+          <p:cNvPr id="12" name="Shape 10"/>
           <p:cNvSpPr/>
           <p:nvPr/>
         </p:nvSpPr>
@@ -2898,7 +2970,7 @@
       </p:sp>
       <p:pic>
         <p:nvPicPr>
-          <p:cNvPr id="12" name="Image 0" descr="/Users/raffaelemontella/devel/riscv-prg32/computer-architecture-with-prg32/tools/assets/game_breakout.png">    </p:cNvPr>
+          <p:cNvPr id="13" name="Image 0" descr="/Users/raffaelemontella/devel/riscv-prg32/computer-architecture-with-prg32/tools/assets/game_breakout.png">    </p:cNvPr>
           <p:cNvPicPr>
             <a:picLocks noChangeAspect="1"/>
           </p:cNvPicPr>

--- a/it/slides/11-Architettura_dei_Calcolatori-Macchine_Combinatorie-Codice.pptx
+++ b/it/slides/11-Architettura_dei_Calcolatori-Macchine_Combinatorie-Codice.pptx
@@ -122,45 +122,45 @@
   <p:extLst>
     <p:ext uri="{521415D9-36F7-43E2-AB2F-B90AF26B5E84}">
       <p14:sectionLst xmlns:p14="http://schemas.microsoft.com/office/powerpoint/2010/main">
-        <p14:section name="Apertura" id="{998af627-b064-3215-d22e-d949f8bd1e2e}">
+        <p14:section name="Apertura" id="{6b40d5eb-6250-e92d-edb1-89038c6dcf3f}">
           <p14:sldIdLst>
             <p14:sldId id="256"/>
             <p14:sldId id="257"/>
           </p14:sldIdLst>
         </p14:section>
-        <p14:section name="Riscaldamento sulla macchina" id="{08e11e9c-ee39-de51-30c9-25207687deec}">
+        <p14:section name="Riscaldamento sulla macchina" id="{d6c53d64-5ef4-039a-049f-9cebc4ca4e59}">
           <p14:sldIdLst>
             <p14:sldId id="258"/>
           </p14:sldIdLst>
         </p14:section>
-        <p14:section name="Decodificatori e codificatori" id="{49631a73-2fb0-5658-1e75-0589a62fdec6}">
+        <p14:section name="Decodificatori e codificatori" id="{4fb42383-3d02-aa1e-3ecb-a2caaa4ad4ae}">
           <p14:sldIdLst>
             <p14:sldId id="259"/>
           </p14:sldIdLst>
         </p14:section>
-        <p14:section name="Multiplexer e demultiplexer" id="{875188ce-936f-fabc-c53c-dd640123bbf8}">
+        <p14:section name="Multiplexer e demultiplexer" id="{6994a41d-c5b0-25a8-3c2c-c1e5fcebe201}">
           <p14:sldIdLst>
             <p14:sldId id="260"/>
           </p14:sldIdLst>
         </p14:section>
-        <p14:section name="Confrontare e controllare" id="{fc334173-5c63-79dc-4f25-d7a3f427978c}">
+        <p14:section name="Confrontare e controllare" id="{554c6388-cdb8-0c74-4975-29e0eee8f726}">
           <p14:sldIdLst>
             <p14:sldId id="261"/>
           </p14:sldIdLst>
         </p14:section>
-        <p14:section name="L'unità aritmetico-logica" id="{4fe351bc-cccf-3cc0-b89c-94346eb43389}">
+        <p14:section name="L'unità aritmetico-logica" id="{f8cba2b6-7790-7513-edd0-9a9cc7417c4c}">
           <p14:sldIdLst>
             <p14:sldId id="262"/>
           </p14:sldIdLst>
         </p14:section>
-        <p14:section name="Il programma completo" id="{c40ecae2-da84-f561-a994-5ad233ae37ef}">
+        <p14:section name="Il programma completo" id="{e65b51a9-4e94-1c16-db50-8f867eac8c91}">
           <p14:sldIdLst>
             <p14:sldId id="263"/>
             <p14:sldId id="264"/>
             <p14:sldId id="265"/>
           </p14:sldIdLst>
         </p14:section>
-        <p14:section name="Eseguire e provare" id="{3fd0e9b6-06aa-f9d4-6389-911ef8cdb8e5}">
+        <p14:section name="Eseguire e provare" id="{18fa7a9d-a9c3-6e2a-cecb-690c97bfa656}">
           <p14:sldIdLst>
             <p14:sldId id="266"/>
             <p14:sldId id="267"/>
@@ -169,7 +169,7 @@
             <p14:sldId id="270"/>
           </p14:sldIdLst>
         </p14:section>
-        <p14:section name="Esercizi" id="{2fa44aaa-ffa1-74b7-e842-8812bb9c8439}">
+        <p14:section name="Esercizi" id="{1d7cbdca-d8d5-b743-8a73-5a5f5d428a61}">
           <p14:sldIdLst>
             <p14:sldId id="271"/>
           </p14:sldIdLst>
@@ -578,7 +578,9 @@
           <a:p>
             <a:r>
               <a:rPr lang="en-US" dirty="0"/>
-              <a:t>Questa è la presentazione del codice della Lezione 11. La presentazione della lezione contiene i concetti; questa contiene tutto ciò che si scrive e si esegue: i listati con la loro spiegazione, il programma completo, che cosa mostra, e il modo di provarlo su ciascuno dei tre host.</a:t>
+              <a:t>Questa è la presentazione del codice della Lezione 11. La presentazione della lezione contiene i concetti; questa contiene tutto ciò che si scrive e si esegue: i listati con la loro spiegazione, il programma completo, che cosa mostra, e il modo di provarlo su ciascuno dei tre host.
+Stato di apprendimento: DA COMPRENDERE OGGI, alla fine di questa lezione lo spiegate, lo seguite passo passo e lo applicate da soli; DA UTILIZZARE OGGI, oggi seguite e usate la ricetta; come funziona dentro si spiega più avanti, o non fa parte del corso; DA COMPRENDERE PIÙ AVANTI, riconoscete il nome e lo scopo; lo spiega una lezione successiva. Una slide senza etichetta è contesto: una storia, un esempio, una domanda, un esercizio.
+Stato di apprendimento di questa lezione. DA COMPRENDERE OGGI: i multiplexer; le reti combinatorie; i codici; decoder ed encoder; comparatori e parità; l'ALU. DA UTILIZZARE OGGI: il programma completo, gli strumenti di PRG32 (si usa, non si studia, in questo corso). DA COMPRENDERE PIÙ AVANTI: macchine a stati finiti (Lezione 13). Una slide senza etichetta è contesto: una storia, un esempio, una domanda, un esercizio.</a:t>
             </a:r>
             <a:endParaRPr lang="en-US" dirty="0"/>
           </a:p>
@@ -667,6 +669,7 @@
             <a:r>
               <a:rPr lang="en-US" dirty="0"/>
               <a:t>Una pagina del programma completo, esattamente com'è nel repository. Leggetelo dall'inizio: l'intestazione dice che cosa mostra il programma e come compilarlo; seguono le tre funzioni init, update e draw, poi i dati. Le righe incontrate nei listati della lezione hanno qui gli stessi commenti.
+DA UTILIZZARE OGGI: il programma completo (si usa, non si studia, in questo corso).
 Per il docente: code/l11.S, come viene compilato ed eseguito dai test. I commenti fanno parte del programma, e sono in inglese come in tutti i listati: leggeteli con il codice.</a:t>
             </a:r>
             <a:endParaRPr lang="en-US" dirty="0"/>
@@ -845,6 +848,7 @@
             <a:r>
               <a:rPr lang="en-US" dirty="0"/>
               <a:t>La via più rapida: PRG32-QT sul vostro computer. Quattro passi, ciascuno con il suo comando. PRG32-QT si comporta come una scheda sulla porta 8080, ed è per questo che il comando di caricamento dice esp32c6. Con la modalità debug abilitata potete fermarvi su qualsiasi istruzione e leggere registri e memoria.
+DA UTILIZZARE OGGI: gli strumenti di PRG32 (si usa, non si studia, in questo corso).
 Per il docente: Eseguito dai test: la cartuccia di questa slide è compilata con questo comando ed eseguita sull'esecutore senza interfaccia di PRG32-QT. Senza la toolchain: importate il file .prg32 in PRG32-QT e scegliete Run Cartridge. Tasti: frecce o WASD per il joystick, Z o J per A, X o K per B, Invio per Start, Esc per tornare a Setup.</a:t>
             </a:r>
             <a:endParaRPr lang="en-US" dirty="0"/>
@@ -934,6 +938,7 @@
             <a:r>
               <a:rPr lang="en-US" dirty="0"/>
               <a:t>Lo stesso programma sull'emulatore. QEMU esegue il firmware vero su un chip emulato, quindi la cartuccia va compilata per l'architettura qemu. Caricate la cartuccia mentre QEMU è chiuso. Il firmware si apre sul menu Setup: scegliete Run Cartridge e lo slot. Ricordate che la tastiera è letta dal terminale, non dalla finestra con l'immagine.
+DA UTILIZZARE OGGI: gli strumenti di PRG32 (si usa, non si studia, in questo corso).
 Per il docente: Verificato dai test fino al caricamento: la cartuccia è compilata per l'architettura qemu e accettata nell'immagine flash dell'emulatore. Ciò che l'emulatore poi mostra non è verificato automaticamente: il QEMU di Espressif ha bisogno della sua finestra. Dall'ottobre 2026 il firmware parte da Setup: scegliete Run Cartridge, poi cart0.</a:t>
             </a:r>
             <a:endParaRPr lang="en-US" dirty="0"/>
@@ -1023,6 +1028,7 @@
             <a:r>
               <a:rPr lang="en-US" dirty="0"/>
               <a:t>Lo stesso programma sul kit. Il firmware si scrive una volta, via USB; dopo, le cartucce viaggiano sul Wi-Fi. Il comando di caricamento è quello usato per PRG32-QT con l'indirizzo della scheda. È l'unico host che i test automatici non eseguono: provatelo, e riferite ciò che vedete.
+DA UTILIZZARE OGGI: gli strumenti di PRG32 (si usa, non si studia, in questo corso).
 Per il docente: Non eseguito dai test: sulla macchina di prova non c'è una scheda. La cartuccia per l'architettura esp32c6 è compilata dai test; i passi sono quelli della documentazione di PRG32. Se la porta seriale non viene trovata, passatela esplicitamente. Per usare il Wi-Fi dell'aula: python3 -m prg32 wifi set --ssid NOME --password PASSWORD --mode sta.</a:t>
             </a:r>
             <a:endParaRPr lang="en-US" dirty="0"/>
@@ -1112,6 +1118,7 @@
             <a:r>
               <a:rPr lang="en-US" dirty="0"/>
               <a:t>I cinque sintomi più comuni, che cosa significa ciascuno, e che cosa fare. Leggete il messaggio prima di cambiare qualcosa: quasi sempre nomina la causa.
+DA UTILIZZARE OGGI: gli strumenti di PRG32 (si usa, non si studia, in questo corso).
 Per il docente: Le prime tre righe coprono la maggior parte dei casi. Quando chiedete aiuto, incollate il comando e l'intero messaggio come testo. docs/usage/troubleshooting.md del repository di PRG32 ha l'elenco completo.</a:t>
             </a:r>
             <a:endParaRPr lang="en-US" dirty="0"/>
@@ -1379,6 +1386,7 @@
             <a:r>
               <a:rPr lang="en-US" dirty="0"/>
               <a:t>a0 contiene un numero da 0 a 3. Le quattro istruzioni sono l'accesso al vettore della Lezione 04: si carica l'indirizzo della tabella, si moltiplica il selettore per 4, si somma, e si carica la parola selezionata. Lo stesso selettore dà sempre lo stesso colore, e nulla viene ricordato da un uso al successivo. Questo comportamento, uscite che dipendono solo dagli ingressi presenti, definisce le macchine di oggi. In hardware questa in particolare è un multiplexer: quattro ingressi dati, due bit di selezione, un'uscita.
+DA COMPRENDERE OGGI: i multiplexer.
 Per il docente: L'accesso al vettore della Lezione 04, letto come circuito. Nel processore la selezione è fatta da porte in molto meno di un nanosecondo; qui richiede quattro istruzioni.</a:t>
             </a:r>
             <a:endParaRPr lang="en-US" dirty="0"/>
@@ -1468,6 +1476,7 @@
             <a:r>
               <a:rPr lang="en-US" dirty="0"/>
               <a:t>Un decodificatore al lavoro nel processore. L'istruzione addi t1, t1, 1 contiene un campo di 5 bit, rd, con il numero del registro di destinazione: 00110, cioè 6, il registro t1. Un decodificatore 5-a-32 trasforma quei cinque bit in trentadue linee di abilitazione alla scrittura, di cui è attiva solo la sesta: solo quel registro riceve il risultato. La stessa istruzione contiene altri due numeri di registro, che selezionano i registri da leggere.
+DA COMPRENDERE OGGI: decoder ed encoder.
 Per il docente: L'istruzione della Lezione 02. I campi grigi non sono coinvolti. L'abilitazione alla scrittura di x0 semplicemente non è collegata: x0 si legge sempre zero. La lettura usa multiplexer, mostrati tra qualche slide.</a:t>
             </a:r>
             <a:endParaRPr lang="en-US" dirty="0"/>
@@ -1557,6 +1566,7 @@
             <a:r>
               <a:rPr lang="en-US" dirty="0"/>
               <a:t>Un multiplexer al lavoro nel processore. add t2, t0, t1 somma due registri; addi t2, t0, 5 somma un registro e una costante presa dall'istruzione. Entrambe usano lo stesso addizionatore. Un multiplexer davanti al secondo ingresso della ALU sceglie tra il valore di un registro e la costante: la sua linea di selezione vale 0 per add e 1 per addi. È un multiplexer su parole intere: trentadue multiplexer a un bit con una linea di selezione comune. Anche leggere un registro è un multiplexer.
+DA COMPRENDERE OGGI: i multiplexer.
 Per il docente: Nel datapath del libro di Patterson e Hennessy il segnale di selezione si chiama ALUSrc. Una porta applicata a ogni bit di una parola con un controllo comune è una porta di parola.</a:t>
             </a:r>
             <a:endParaRPr lang="en-US" dirty="0"/>
@@ -1646,6 +1656,7 @@
             <a:r>
               <a:rPr lang="en-US" dirty="0"/>
               <a:t>Una rete di parità in software, per un byte. Ogni coppia di istruzioni scorre il valore a destra e lo combina con se stesso tramite XOR: il primo ripiegamento porta otto bit su quattro, il secondo quattro su due, il terzo due su uno. L'ultima istruzione tiene solo il bit più basso, che è la parità. In hardware gli stessi tre livelli sono un albero di sette porte XOR. Tracciatela a mano con 0x53, che ha quattro 1, e con 0x13, che ne ha tre.
+DA COMPRENDERE OGGI: comparatori e parità.
 Per il docente: Scritto per questa lezione. Tracciarlo con 0x53 = 0101 0011 (quattro 1, risultato 0) e con 0x13 = 0001 0011 (tre 1, risultato 1). In hardware i tre livelli sono un albero di sette porte XOR.</a:t>
             </a:r>
             <a:endParaRPr lang="en-US" dirty="0"/>
@@ -1735,6 +1746,7 @@
             <a:r>
               <a:rPr lang="en-US" dirty="0"/>
               <a:t>Come un'istruzione sceglie l'operazione. Il campo di 3 bit funct3 dell'istruzione è un codice compatto: 000 per somma o differenza, 001 per lo scorrimento a sinistra, 100 per XOR, 110 per OR, 111 per AND. Un piccolo decodificatore lo trasforma nelle linee di selezione del multiplexer della ALU. Dove due istruzioni condividono un valore, come add e sub, le distingue un altro bit altrove nell'istruzione. Un codice, un decodificatore, un multiplexer: l'intera lezione in una tabella.
+DA COMPRENDERE OGGI: l'ALU.
 Per il docente: funct3 è il campo di 3 bit dell'istruzione visto nella Lezione 02 (bit da 14 a 12). Tre bit, otto parole codice: un codice compatto che un piccolo decodificatore trasforma nelle linee di selezione del multiplexer della ALU.</a:t>
             </a:r>
             <a:endParaRPr lang="en-US" dirty="0"/>
@@ -1824,6 +1836,7 @@
             <a:r>
               <a:rPr lang="en-US" dirty="0"/>
               <a:t>Una pagina del programma completo, esattamente com'è nel repository. Leggetelo dall'inizio: l'intestazione dice che cosa mostra il programma e come compilarlo; seguono le tre funzioni init, update e draw, poi i dati. Le righe incontrate nei listati della lezione hanno qui gli stessi commenti.
+DA UTILIZZARE OGGI: il programma completo (si usa, non si studia, in questo corso).
 Per il docente: code/l11.S, come viene compilato ed eseguito dai test. I commenti fanno parte del programma, e sono in inglese come in tutti i listati: leggeteli con il codice.</a:t>
             </a:r>
             <a:endParaRPr lang="en-US" dirty="0"/>
@@ -1913,6 +1926,7 @@
             <a:r>
               <a:rPr lang="en-US" dirty="0"/>
               <a:t>Una pagina del programma completo, esattamente com'è nel repository. Leggetelo dall'inizio: l'intestazione dice che cosa mostra il programma e come compilarlo; seguono le tre funzioni init, update e draw, poi i dati. Le righe incontrate nei listati della lezione hanno qui gli stessi commenti.
+DA UTILIZZARE OGGI: il programma completo (si usa, non si studia, in questo corso).
 Per il docente: code/l11.S, come viene compilato ed eseguito dai test. I commenti fanno parte del programma, e sono in inglese come in tutti i listati: leggeteli con il codice.</a:t>
             </a:r>
             <a:endParaRPr lang="en-US" dirty="0"/>
@@ -2994,6 +3008,420 @@
       </p:pic>
       <p:sp>
         <p:nvSpPr>
+          <p:cNvPr id="14" name="Shape 11"/>
+          <p:cNvSpPr/>
+          <p:nvPr/>
+        </p:nvSpPr>
+        <p:spPr>
+          <a:xfrm>
+            <a:off x="8910777" y="91440"/>
+            <a:ext cx="2732278" cy="274320"/>
+          </a:xfrm>
+          <a:prstGeom prst="rect">
+            <a:avLst/>
+          </a:prstGeom>
+          <a:solidFill>
+            <a:srgbClr val="F3E8FF"/>
+          </a:solidFill>
+          <a:ln w="12700">
+            <a:solidFill>
+              <a:srgbClr val="7E22CE"/>
+            </a:solidFill>
+            <a:prstDash val="dash"/>
+          </a:ln>
+        </p:spPr>
+      </p:sp>
+      <p:sp>
+        <p:nvSpPr>
+          <p:cNvPr id="15" name="Shape 12"/>
+          <p:cNvSpPr/>
+          <p:nvPr/>
+        </p:nvSpPr>
+        <p:spPr>
+          <a:xfrm>
+            <a:off x="8938209" y="128016"/>
+            <a:ext cx="45720" cy="45720"/>
+          </a:xfrm>
+          <a:prstGeom prst="rect">
+            <a:avLst/>
+          </a:prstGeom>
+          <a:solidFill>
+            <a:srgbClr val="7E22CE"/>
+          </a:solidFill>
+          <a:ln w="12700">
+            <a:solidFill>
+              <a:srgbClr val="7E22CE"/>
+            </a:solidFill>
+            <a:prstDash val="solid"/>
+          </a:ln>
+        </p:spPr>
+      </p:sp>
+      <p:sp>
+        <p:nvSpPr>
+          <p:cNvPr id="16" name="Shape 13"/>
+          <p:cNvSpPr/>
+          <p:nvPr/>
+        </p:nvSpPr>
+        <p:spPr>
+          <a:xfrm>
+            <a:off x="8938209" y="205740"/>
+            <a:ext cx="45720" cy="45720"/>
+          </a:xfrm>
+          <a:prstGeom prst="rect">
+            <a:avLst/>
+          </a:prstGeom>
+          <a:solidFill>
+            <a:srgbClr val="7E22CE"/>
+          </a:solidFill>
+          <a:ln w="12700">
+            <a:solidFill>
+              <a:srgbClr val="7E22CE"/>
+            </a:solidFill>
+            <a:prstDash val="solid"/>
+          </a:ln>
+        </p:spPr>
+      </p:sp>
+      <p:sp>
+        <p:nvSpPr>
+          <p:cNvPr id="17" name="Shape 14"/>
+          <p:cNvSpPr/>
+          <p:nvPr/>
+        </p:nvSpPr>
+        <p:spPr>
+          <a:xfrm>
+            <a:off x="8938209" y="283464"/>
+            <a:ext cx="45720" cy="45720"/>
+          </a:xfrm>
+          <a:prstGeom prst="rect">
+            <a:avLst/>
+          </a:prstGeom>
+          <a:solidFill>
+            <a:srgbClr val="7E22CE"/>
+          </a:solidFill>
+          <a:ln w="12700">
+            <a:solidFill>
+              <a:srgbClr val="7E22CE"/>
+            </a:solidFill>
+            <a:prstDash val="solid"/>
+          </a:ln>
+        </p:spPr>
+      </p:sp>
+      <p:pic>
+        <p:nvPicPr>
+          <p:cNvPr id="18" name="Image 1" descr="preencoded.png">    </p:cNvPr>
+          <p:cNvPicPr>
+            <a:picLocks noChangeAspect="1"/>
+          </p:cNvPicPr>
+          <p:nvPr/>
+        </p:nvPicPr>
+        <p:blipFill>
+          <a:blip r:embed="rId2"/>
+          <a:stretch>
+            <a:fillRect/>
+          </a:stretch>
+        </p:blipFill>
+        <p:spPr>
+          <a:xfrm>
+            <a:off x="9038793" y="128016"/>
+            <a:ext cx="201168" cy="201168"/>
+          </a:xfrm>
+          <a:prstGeom prst="rect">
+            <a:avLst/>
+          </a:prstGeom>
+        </p:spPr>
+      </p:pic>
+      <p:sp>
+        <p:nvSpPr>
+          <p:cNvPr id="19" name="Text 15"/>
+          <p:cNvSpPr txBox="1"/>
+          <p:nvPr/>
+        </p:nvSpPr>
+        <p:spPr>
+          <a:xfrm>
+            <a:off x="9294825" y="91440"/>
+            <a:ext cx="2311654" cy="274320"/>
+          </a:xfrm>
+          <a:prstGeom prst="rect">
+            <a:avLst/>
+          </a:prstGeom>
+          <a:noFill/>
+          <a:ln/>
+        </p:spPr>
+        <p:txBody>
+          <a:bodyPr wrap="square" lIns="0" tIns="0" rIns="0" bIns="0" rtlCol="0" anchor="ctr"/>
+          <a:lstStyle/>
+          <a:p>
+            <a:pPr indent="0" marL="0">
+              <a:buNone/>
+            </a:pPr>
+            <a:r>
+              <a:rPr lang="en-US" sz="1100" b="1" dirty="0">
+                <a:solidFill>
+                  <a:srgbClr val="6B21A8"/>
+                </a:solidFill>
+                <a:latin typeface="Calibri" pitchFamily="34" charset="0"/>
+                <a:ea typeface="Calibri" pitchFamily="34" charset="-122"/>
+                <a:cs typeface="Calibri" pitchFamily="34" charset="-120"/>
+              </a:rPr>
+              <a:t>DA COMPRENDERE PIÙ AVANTI</a:t>
+            </a:r>
+            <a:endParaRPr lang="en-US" sz="1100" dirty="0"/>
+          </a:p>
+        </p:txBody>
+      </p:sp>
+      <p:sp>
+        <p:nvSpPr>
+          <p:cNvPr id="20" name="Shape 16"/>
+          <p:cNvSpPr/>
+          <p:nvPr/>
+        </p:nvSpPr>
+        <p:spPr>
+          <a:xfrm>
+            <a:off x="6675069" y="91440"/>
+            <a:ext cx="2125980" cy="274320"/>
+          </a:xfrm>
+          <a:prstGeom prst="rect">
+            <a:avLst/>
+          </a:prstGeom>
+          <a:solidFill>
+            <a:srgbClr val="FEF3C7"/>
+          </a:solidFill>
+          <a:ln w="12700">
+            <a:solidFill>
+              <a:srgbClr val="B45309"/>
+            </a:solidFill>
+            <a:prstDash val="solid"/>
+          </a:ln>
+        </p:spPr>
+      </p:sp>
+      <p:sp>
+        <p:nvSpPr>
+          <p:cNvPr id="21" name="Shape 17"/>
+          <p:cNvSpPr/>
+          <p:nvPr/>
+        </p:nvSpPr>
+        <p:spPr>
+          <a:xfrm>
+            <a:off x="6675069" y="91440"/>
+            <a:ext cx="27432" cy="274320"/>
+          </a:xfrm>
+          <a:prstGeom prst="rect">
+            <a:avLst/>
+          </a:prstGeom>
+          <a:solidFill>
+            <a:srgbClr val="B45309"/>
+          </a:solidFill>
+          <a:ln w="12700">
+            <a:solidFill>
+              <a:srgbClr val="B45309"/>
+            </a:solidFill>
+            <a:prstDash val="solid"/>
+          </a:ln>
+        </p:spPr>
+      </p:sp>
+      <p:sp>
+        <p:nvSpPr>
+          <p:cNvPr id="22" name="Shape 18"/>
+          <p:cNvSpPr/>
+          <p:nvPr/>
+        </p:nvSpPr>
+        <p:spPr>
+          <a:xfrm>
+            <a:off x="6729933" y="91440"/>
+            <a:ext cx="27432" cy="274320"/>
+          </a:xfrm>
+          <a:prstGeom prst="rect">
+            <a:avLst/>
+          </a:prstGeom>
+          <a:solidFill>
+            <a:srgbClr val="B45309"/>
+          </a:solidFill>
+          <a:ln w="12700">
+            <a:solidFill>
+              <a:srgbClr val="B45309"/>
+            </a:solidFill>
+            <a:prstDash val="solid"/>
+          </a:ln>
+        </p:spPr>
+      </p:sp>
+      <p:pic>
+        <p:nvPicPr>
+          <p:cNvPr id="23" name="Image 2" descr="preencoded.png">    </p:cNvPr>
+          <p:cNvPicPr>
+            <a:picLocks noChangeAspect="1"/>
+          </p:cNvPicPr>
+          <p:nvPr/>
+        </p:nvPicPr>
+        <p:blipFill>
+          <a:blip r:embed="rId3"/>
+          <a:stretch>
+            <a:fillRect/>
+          </a:stretch>
+        </p:blipFill>
+        <p:spPr>
+          <a:xfrm>
+            <a:off x="6803085" y="128016"/>
+            <a:ext cx="201168" cy="201168"/>
+          </a:xfrm>
+          <a:prstGeom prst="rect">
+            <a:avLst/>
+          </a:prstGeom>
+        </p:spPr>
+      </p:pic>
+      <p:sp>
+        <p:nvSpPr>
+          <p:cNvPr id="24" name="Text 19"/>
+          <p:cNvSpPr txBox="1"/>
+          <p:nvPr/>
+        </p:nvSpPr>
+        <p:spPr>
+          <a:xfrm>
+            <a:off x="7059117" y="91440"/>
+            <a:ext cx="1705356" cy="274320"/>
+          </a:xfrm>
+          <a:prstGeom prst="rect">
+            <a:avLst/>
+          </a:prstGeom>
+          <a:noFill/>
+          <a:ln/>
+        </p:spPr>
+        <p:txBody>
+          <a:bodyPr wrap="square" lIns="0" tIns="0" rIns="0" bIns="0" rtlCol="0" anchor="ctr"/>
+          <a:lstStyle/>
+          <a:p>
+            <a:pPr indent="0" marL="0">
+              <a:buNone/>
+            </a:pPr>
+            <a:r>
+              <a:rPr lang="en-US" sz="1100" b="1" dirty="0">
+                <a:solidFill>
+                  <a:srgbClr val="92400E"/>
+                </a:solidFill>
+                <a:latin typeface="Calibri" pitchFamily="34" charset="0"/>
+                <a:ea typeface="Calibri" pitchFamily="34" charset="-122"/>
+                <a:cs typeface="Calibri" pitchFamily="34" charset="-120"/>
+              </a:rPr>
+              <a:t>DA UTILIZZARE OGGI</a:t>
+            </a:r>
+            <a:endParaRPr lang="en-US" sz="1100" dirty="0"/>
+          </a:p>
+        </p:txBody>
+      </p:sp>
+      <p:sp>
+        <p:nvSpPr>
+          <p:cNvPr id="25" name="Shape 20"/>
+          <p:cNvSpPr/>
+          <p:nvPr/>
+        </p:nvSpPr>
+        <p:spPr>
+          <a:xfrm>
+            <a:off x="4352747" y="91440"/>
+            <a:ext cx="2212594" cy="274320"/>
+          </a:xfrm>
+          <a:prstGeom prst="rect">
+            <a:avLst/>
+          </a:prstGeom>
+          <a:solidFill>
+            <a:srgbClr val="E0F2FE"/>
+          </a:solidFill>
+          <a:ln w="12700">
+            <a:solidFill>
+              <a:srgbClr val="0369A1"/>
+            </a:solidFill>
+            <a:prstDash val="solid"/>
+          </a:ln>
+        </p:spPr>
+      </p:sp>
+      <p:sp>
+        <p:nvSpPr>
+          <p:cNvPr id="26" name="Shape 21"/>
+          <p:cNvSpPr/>
+          <p:nvPr/>
+        </p:nvSpPr>
+        <p:spPr>
+          <a:xfrm>
+            <a:off x="4352747" y="91440"/>
+            <a:ext cx="73152" cy="274320"/>
+          </a:xfrm>
+          <a:prstGeom prst="rect">
+            <a:avLst/>
+          </a:prstGeom>
+          <a:solidFill>
+            <a:srgbClr val="0369A1"/>
+          </a:solidFill>
+          <a:ln w="12700">
+            <a:solidFill>
+              <a:srgbClr val="0369A1"/>
+            </a:solidFill>
+            <a:prstDash val="solid"/>
+          </a:ln>
+        </p:spPr>
+      </p:sp>
+      <p:pic>
+        <p:nvPicPr>
+          <p:cNvPr id="27" name="Image 3" descr="preencoded.png">    </p:cNvPr>
+          <p:cNvPicPr>
+            <a:picLocks noChangeAspect="1"/>
+          </p:cNvPicPr>
+          <p:nvPr/>
+        </p:nvPicPr>
+        <p:blipFill>
+          <a:blip r:embed="rId4"/>
+          <a:stretch>
+            <a:fillRect/>
+          </a:stretch>
+        </p:blipFill>
+        <p:spPr>
+          <a:xfrm>
+            <a:off x="4480763" y="128016"/>
+            <a:ext cx="201168" cy="201168"/>
+          </a:xfrm>
+          <a:prstGeom prst="rect">
+            <a:avLst/>
+          </a:prstGeom>
+        </p:spPr>
+      </p:pic>
+      <p:sp>
+        <p:nvSpPr>
+          <p:cNvPr id="28" name="Text 22"/>
+          <p:cNvSpPr txBox="1"/>
+          <p:nvPr/>
+        </p:nvSpPr>
+        <p:spPr>
+          <a:xfrm>
+            <a:off x="4736795" y="91440"/>
+            <a:ext cx="1791970" cy="274320"/>
+          </a:xfrm>
+          <a:prstGeom prst="rect">
+            <a:avLst/>
+          </a:prstGeom>
+          <a:noFill/>
+          <a:ln/>
+        </p:spPr>
+        <p:txBody>
+          <a:bodyPr wrap="square" lIns="0" tIns="0" rIns="0" bIns="0" rtlCol="0" anchor="ctr"/>
+          <a:lstStyle/>
+          <a:p>
+            <a:pPr indent="0" marL="0">
+              <a:buNone/>
+            </a:pPr>
+            <a:r>
+              <a:rPr lang="en-US" sz="1100" b="1" dirty="0">
+                <a:solidFill>
+                  <a:srgbClr val="075985"/>
+                </a:solidFill>
+                <a:latin typeface="Calibri" pitchFamily="34" charset="0"/>
+                <a:ea typeface="Calibri" pitchFamily="34" charset="-122"/>
+                <a:cs typeface="Calibri" pitchFamily="34" charset="-120"/>
+              </a:rPr>
+              <a:t>DA COMPRENDERE OGGI</a:t>
+            </a:r>
+            <a:endParaRPr lang="en-US" sz="1100" dirty="0"/>
+          </a:p>
+        </p:txBody>
+      </p:sp>
+      <p:sp>
+        <p:nvSpPr>
           <p:cNvPr id="25" name="Slide Number Placeholder 0"/>
           <p:cNvSpPr>
             <a:spLocks noGrp="1"/>
@@ -3259,6 +3687,158 @@
       </p:sp>
       <p:sp>
         <p:nvSpPr>
+          <p:cNvPr id="5" name="Shape 3"/>
+          <p:cNvSpPr/>
+          <p:nvPr/>
+        </p:nvSpPr>
+        <p:spPr>
+          <a:xfrm>
+            <a:off x="7941259" y="91440"/>
+            <a:ext cx="3701796" cy="274320"/>
+          </a:xfrm>
+          <a:prstGeom prst="rect">
+            <a:avLst/>
+          </a:prstGeom>
+          <a:solidFill>
+            <a:srgbClr val="FEF3C7"/>
+          </a:solidFill>
+          <a:ln w="12700">
+            <a:solidFill>
+              <a:srgbClr val="B45309"/>
+            </a:solidFill>
+            <a:prstDash val="solid"/>
+          </a:ln>
+        </p:spPr>
+      </p:sp>
+      <p:sp>
+        <p:nvSpPr>
+          <p:cNvPr id="6" name="Shape 4"/>
+          <p:cNvSpPr/>
+          <p:nvPr/>
+        </p:nvSpPr>
+        <p:spPr>
+          <a:xfrm>
+            <a:off x="7941259" y="91440"/>
+            <a:ext cx="27432" cy="274320"/>
+          </a:xfrm>
+          <a:prstGeom prst="rect">
+            <a:avLst/>
+          </a:prstGeom>
+          <a:solidFill>
+            <a:srgbClr val="B45309"/>
+          </a:solidFill>
+          <a:ln w="12700">
+            <a:solidFill>
+              <a:srgbClr val="B45309"/>
+            </a:solidFill>
+            <a:prstDash val="solid"/>
+          </a:ln>
+        </p:spPr>
+      </p:sp>
+      <p:sp>
+        <p:nvSpPr>
+          <p:cNvPr id="7" name="Shape 5"/>
+          <p:cNvSpPr/>
+          <p:nvPr/>
+        </p:nvSpPr>
+        <p:spPr>
+          <a:xfrm>
+            <a:off x="7996123" y="91440"/>
+            <a:ext cx="27432" cy="274320"/>
+          </a:xfrm>
+          <a:prstGeom prst="rect">
+            <a:avLst/>
+          </a:prstGeom>
+          <a:solidFill>
+            <a:srgbClr val="B45309"/>
+          </a:solidFill>
+          <a:ln w="12700">
+            <a:solidFill>
+              <a:srgbClr val="B45309"/>
+            </a:solidFill>
+            <a:prstDash val="solid"/>
+          </a:ln>
+        </p:spPr>
+      </p:sp>
+      <p:pic>
+        <p:nvPicPr>
+          <p:cNvPr id="8" name="Image 0" descr="preencoded.png">    </p:cNvPr>
+          <p:cNvPicPr>
+            <a:picLocks noChangeAspect="1"/>
+          </p:cNvPicPr>
+          <p:nvPr/>
+        </p:nvPicPr>
+        <p:blipFill>
+          <a:blip r:embed="rId1"/>
+          <a:stretch>
+            <a:fillRect/>
+          </a:stretch>
+        </p:blipFill>
+        <p:spPr>
+          <a:xfrm>
+            <a:off x="8069275" y="128016"/>
+            <a:ext cx="201168" cy="201168"/>
+          </a:xfrm>
+          <a:prstGeom prst="rect">
+            <a:avLst/>
+          </a:prstGeom>
+        </p:spPr>
+      </p:pic>
+      <p:sp>
+        <p:nvSpPr>
+          <p:cNvPr id="9" name="Text 6"/>
+          <p:cNvSpPr txBox="1"/>
+          <p:nvPr/>
+        </p:nvSpPr>
+        <p:spPr>
+          <a:xfrm>
+            <a:off x="8325307" y="91440"/>
+            <a:ext cx="3281172" cy="274320"/>
+          </a:xfrm>
+          <a:prstGeom prst="rect">
+            <a:avLst/>
+          </a:prstGeom>
+          <a:noFill/>
+          <a:ln/>
+        </p:spPr>
+        <p:txBody>
+          <a:bodyPr wrap="square" lIns="0" tIns="0" rIns="0" bIns="0" rtlCol="0" anchor="ctr"/>
+          <a:lstStyle/>
+          <a:p>
+            <a:pPr indent="0" marL="0">
+              <a:buNone/>
+            </a:pPr>
+            <a:r>
+              <a:rPr lang="en-US" sz="1100" b="1" dirty="0">
+                <a:solidFill>
+                  <a:srgbClr val="92400E"/>
+                </a:solidFill>
+                <a:latin typeface="Calibri" pitchFamily="34" charset="0"/>
+                <a:ea typeface="Calibri" pitchFamily="34" charset="-122"/>
+                <a:cs typeface="Calibri" pitchFamily="34" charset="-120"/>
+              </a:rPr>
+              <a:t>DA UTILIZZARE OGGI</a:t>
+            </a:r>
+            <a:pPr indent="0" marL="0">
+              <a:buNone/>
+            </a:pPr>
+            <a:r>
+              <a:rPr lang="en-US" sz="1100" dirty="0">
+                <a:solidFill>
+                  <a:srgbClr val="92400E"/>
+                </a:solidFill>
+                <a:latin typeface="Calibri" pitchFamily="34" charset="0"/>
+                <a:ea typeface="Calibri" pitchFamily="34" charset="-122"/>
+                <a:cs typeface="Calibri" pitchFamily="34" charset="-120"/>
+              </a:rPr>
+              <a:t> · il programma completo</a:t>
+            </a:r>
+            <a:endParaRPr lang="en-US" sz="1100" dirty="0"/>
+          </a:p>
+        </p:txBody>
+      </p:sp>
+      <p:sp>
+        <p:nvSpPr>
           <p:cNvPr id="25" name="Slide Number Placeholder 0"/>
           <p:cNvSpPr>
             <a:spLocks noGrp="1"/>
@@ -4412,6 +4992,158 @@
       </p:sp>
       <p:sp>
         <p:nvSpPr>
+          <p:cNvPr id="17" name="Shape 15"/>
+          <p:cNvSpPr/>
+          <p:nvPr/>
+        </p:nvSpPr>
+        <p:spPr>
+          <a:xfrm>
+            <a:off x="7875600" y="91440"/>
+            <a:ext cx="3767455" cy="274320"/>
+          </a:xfrm>
+          <a:prstGeom prst="rect">
+            <a:avLst/>
+          </a:prstGeom>
+          <a:solidFill>
+            <a:srgbClr val="FEF3C7"/>
+          </a:solidFill>
+          <a:ln w="12700">
+            <a:solidFill>
+              <a:srgbClr val="B45309"/>
+            </a:solidFill>
+            <a:prstDash val="solid"/>
+          </a:ln>
+        </p:spPr>
+      </p:sp>
+      <p:sp>
+        <p:nvSpPr>
+          <p:cNvPr id="18" name="Shape 16"/>
+          <p:cNvSpPr/>
+          <p:nvPr/>
+        </p:nvSpPr>
+        <p:spPr>
+          <a:xfrm>
+            <a:off x="7875600" y="91440"/>
+            <a:ext cx="27432" cy="274320"/>
+          </a:xfrm>
+          <a:prstGeom prst="rect">
+            <a:avLst/>
+          </a:prstGeom>
+          <a:solidFill>
+            <a:srgbClr val="B45309"/>
+          </a:solidFill>
+          <a:ln w="12700">
+            <a:solidFill>
+              <a:srgbClr val="B45309"/>
+            </a:solidFill>
+            <a:prstDash val="solid"/>
+          </a:ln>
+        </p:spPr>
+      </p:sp>
+      <p:sp>
+        <p:nvSpPr>
+          <p:cNvPr id="19" name="Shape 17"/>
+          <p:cNvSpPr/>
+          <p:nvPr/>
+        </p:nvSpPr>
+        <p:spPr>
+          <a:xfrm>
+            <a:off x="7930464" y="91440"/>
+            <a:ext cx="27432" cy="274320"/>
+          </a:xfrm>
+          <a:prstGeom prst="rect">
+            <a:avLst/>
+          </a:prstGeom>
+          <a:solidFill>
+            <a:srgbClr val="B45309"/>
+          </a:solidFill>
+          <a:ln w="12700">
+            <a:solidFill>
+              <a:srgbClr val="B45309"/>
+            </a:solidFill>
+            <a:prstDash val="solid"/>
+          </a:ln>
+        </p:spPr>
+      </p:sp>
+      <p:pic>
+        <p:nvPicPr>
+          <p:cNvPr id="20" name="Image 0" descr="preencoded.png">    </p:cNvPr>
+          <p:cNvPicPr>
+            <a:picLocks noChangeAspect="1"/>
+          </p:cNvPicPr>
+          <p:nvPr/>
+        </p:nvPicPr>
+        <p:blipFill>
+          <a:blip r:embed="rId1"/>
+          <a:stretch>
+            <a:fillRect/>
+          </a:stretch>
+        </p:blipFill>
+        <p:spPr>
+          <a:xfrm>
+            <a:off x="8003616" y="128016"/>
+            <a:ext cx="201168" cy="201168"/>
+          </a:xfrm>
+          <a:prstGeom prst="rect">
+            <a:avLst/>
+          </a:prstGeom>
+        </p:spPr>
+      </p:pic>
+      <p:sp>
+        <p:nvSpPr>
+          <p:cNvPr id="21" name="Text 18"/>
+          <p:cNvSpPr txBox="1"/>
+          <p:nvPr/>
+        </p:nvSpPr>
+        <p:spPr>
+          <a:xfrm>
+            <a:off x="8259648" y="91440"/>
+            <a:ext cx="3346831" cy="274320"/>
+          </a:xfrm>
+          <a:prstGeom prst="rect">
+            <a:avLst/>
+          </a:prstGeom>
+          <a:noFill/>
+          <a:ln/>
+        </p:spPr>
+        <p:txBody>
+          <a:bodyPr wrap="square" lIns="0" tIns="0" rIns="0" bIns="0" rtlCol="0" anchor="ctr"/>
+          <a:lstStyle/>
+          <a:p>
+            <a:pPr indent="0" marL="0">
+              <a:buNone/>
+            </a:pPr>
+            <a:r>
+              <a:rPr lang="en-US" sz="1100" b="1" dirty="0">
+                <a:solidFill>
+                  <a:srgbClr val="92400E"/>
+                </a:solidFill>
+                <a:latin typeface="Calibri" pitchFamily="34" charset="0"/>
+                <a:ea typeface="Calibri" pitchFamily="34" charset="-122"/>
+                <a:cs typeface="Calibri" pitchFamily="34" charset="-120"/>
+              </a:rPr>
+              <a:t>DA UTILIZZARE OGGI</a:t>
+            </a:r>
+            <a:pPr indent="0" marL="0">
+              <a:buNone/>
+            </a:pPr>
+            <a:r>
+              <a:rPr lang="en-US" sz="1100" dirty="0">
+                <a:solidFill>
+                  <a:srgbClr val="92400E"/>
+                </a:solidFill>
+                <a:latin typeface="Calibri" pitchFamily="34" charset="0"/>
+                <a:ea typeface="Calibri" pitchFamily="34" charset="-122"/>
+                <a:cs typeface="Calibri" pitchFamily="34" charset="-120"/>
+              </a:rPr>
+              <a:t> · gli strumenti di PRG32</a:t>
+            </a:r>
+            <a:endParaRPr lang="en-US" sz="1100" dirty="0"/>
+          </a:p>
+        </p:txBody>
+      </p:sp>
+      <p:sp>
+        <p:nvSpPr>
           <p:cNvPr id="25" name="Slide Number Placeholder 0"/>
           <p:cNvSpPr>
             <a:spLocks noGrp="1"/>
@@ -5248,6 +5980,158 @@
       </p:sp>
       <p:sp>
         <p:nvSpPr>
+          <p:cNvPr id="17" name="Shape 15"/>
+          <p:cNvSpPr/>
+          <p:nvPr/>
+        </p:nvSpPr>
+        <p:spPr>
+          <a:xfrm>
+            <a:off x="7875600" y="91440"/>
+            <a:ext cx="3767455" cy="274320"/>
+          </a:xfrm>
+          <a:prstGeom prst="rect">
+            <a:avLst/>
+          </a:prstGeom>
+          <a:solidFill>
+            <a:srgbClr val="FEF3C7"/>
+          </a:solidFill>
+          <a:ln w="12700">
+            <a:solidFill>
+              <a:srgbClr val="B45309"/>
+            </a:solidFill>
+            <a:prstDash val="solid"/>
+          </a:ln>
+        </p:spPr>
+      </p:sp>
+      <p:sp>
+        <p:nvSpPr>
+          <p:cNvPr id="18" name="Shape 16"/>
+          <p:cNvSpPr/>
+          <p:nvPr/>
+        </p:nvSpPr>
+        <p:spPr>
+          <a:xfrm>
+            <a:off x="7875600" y="91440"/>
+            <a:ext cx="27432" cy="274320"/>
+          </a:xfrm>
+          <a:prstGeom prst="rect">
+            <a:avLst/>
+          </a:prstGeom>
+          <a:solidFill>
+            <a:srgbClr val="B45309"/>
+          </a:solidFill>
+          <a:ln w="12700">
+            <a:solidFill>
+              <a:srgbClr val="B45309"/>
+            </a:solidFill>
+            <a:prstDash val="solid"/>
+          </a:ln>
+        </p:spPr>
+      </p:sp>
+      <p:sp>
+        <p:nvSpPr>
+          <p:cNvPr id="19" name="Shape 17"/>
+          <p:cNvSpPr/>
+          <p:nvPr/>
+        </p:nvSpPr>
+        <p:spPr>
+          <a:xfrm>
+            <a:off x="7930464" y="91440"/>
+            <a:ext cx="27432" cy="274320"/>
+          </a:xfrm>
+          <a:prstGeom prst="rect">
+            <a:avLst/>
+          </a:prstGeom>
+          <a:solidFill>
+            <a:srgbClr val="B45309"/>
+          </a:solidFill>
+          <a:ln w="12700">
+            <a:solidFill>
+              <a:srgbClr val="B45309"/>
+            </a:solidFill>
+            <a:prstDash val="solid"/>
+          </a:ln>
+        </p:spPr>
+      </p:sp>
+      <p:pic>
+        <p:nvPicPr>
+          <p:cNvPr id="20" name="Image 0" descr="preencoded.png">    </p:cNvPr>
+          <p:cNvPicPr>
+            <a:picLocks noChangeAspect="1"/>
+          </p:cNvPicPr>
+          <p:nvPr/>
+        </p:nvPicPr>
+        <p:blipFill>
+          <a:blip r:embed="rId1"/>
+          <a:stretch>
+            <a:fillRect/>
+          </a:stretch>
+        </p:blipFill>
+        <p:spPr>
+          <a:xfrm>
+            <a:off x="8003616" y="128016"/>
+            <a:ext cx="201168" cy="201168"/>
+          </a:xfrm>
+          <a:prstGeom prst="rect">
+            <a:avLst/>
+          </a:prstGeom>
+        </p:spPr>
+      </p:pic>
+      <p:sp>
+        <p:nvSpPr>
+          <p:cNvPr id="21" name="Text 18"/>
+          <p:cNvSpPr txBox="1"/>
+          <p:nvPr/>
+        </p:nvSpPr>
+        <p:spPr>
+          <a:xfrm>
+            <a:off x="8259648" y="91440"/>
+            <a:ext cx="3346831" cy="274320"/>
+          </a:xfrm>
+          <a:prstGeom prst="rect">
+            <a:avLst/>
+          </a:prstGeom>
+          <a:noFill/>
+          <a:ln/>
+        </p:spPr>
+        <p:txBody>
+          <a:bodyPr wrap="square" lIns="0" tIns="0" rIns="0" bIns="0" rtlCol="0" anchor="ctr"/>
+          <a:lstStyle/>
+          <a:p>
+            <a:pPr indent="0" marL="0">
+              <a:buNone/>
+            </a:pPr>
+            <a:r>
+              <a:rPr lang="en-US" sz="1100" b="1" dirty="0">
+                <a:solidFill>
+                  <a:srgbClr val="92400E"/>
+                </a:solidFill>
+                <a:latin typeface="Calibri" pitchFamily="34" charset="0"/>
+                <a:ea typeface="Calibri" pitchFamily="34" charset="-122"/>
+                <a:cs typeface="Calibri" pitchFamily="34" charset="-120"/>
+              </a:rPr>
+              <a:t>DA UTILIZZARE OGGI</a:t>
+            </a:r>
+            <a:pPr indent="0" marL="0">
+              <a:buNone/>
+            </a:pPr>
+            <a:r>
+              <a:rPr lang="en-US" sz="1100" dirty="0">
+                <a:solidFill>
+                  <a:srgbClr val="92400E"/>
+                </a:solidFill>
+                <a:latin typeface="Calibri" pitchFamily="34" charset="0"/>
+                <a:ea typeface="Calibri" pitchFamily="34" charset="-122"/>
+                <a:cs typeface="Calibri" pitchFamily="34" charset="-120"/>
+              </a:rPr>
+              <a:t> · gli strumenti di PRG32</a:t>
+            </a:r>
+            <a:endParaRPr lang="en-US" sz="1100" dirty="0"/>
+          </a:p>
+        </p:txBody>
+      </p:sp>
+      <p:sp>
+        <p:nvSpPr>
           <p:cNvPr id="25" name="Slide Number Placeholder 0"/>
           <p:cNvSpPr>
             <a:spLocks noGrp="1"/>
@@ -6077,6 +6961,158 @@
                 <a:cs typeface="Calibri" pitchFamily="34" charset="-120"/>
               </a:rPr>
               <a:t>Schermo nero: confrontate il cablaggio del display con il firmware</a:t>
+            </a:r>
+            <a:endParaRPr lang="en-US" sz="1100" dirty="0"/>
+          </a:p>
+        </p:txBody>
+      </p:sp>
+      <p:sp>
+        <p:nvSpPr>
+          <p:cNvPr id="17" name="Shape 15"/>
+          <p:cNvSpPr/>
+          <p:nvPr/>
+        </p:nvSpPr>
+        <p:spPr>
+          <a:xfrm>
+            <a:off x="7875600" y="91440"/>
+            <a:ext cx="3767455" cy="274320"/>
+          </a:xfrm>
+          <a:prstGeom prst="rect">
+            <a:avLst/>
+          </a:prstGeom>
+          <a:solidFill>
+            <a:srgbClr val="FEF3C7"/>
+          </a:solidFill>
+          <a:ln w="12700">
+            <a:solidFill>
+              <a:srgbClr val="B45309"/>
+            </a:solidFill>
+            <a:prstDash val="solid"/>
+          </a:ln>
+        </p:spPr>
+      </p:sp>
+      <p:sp>
+        <p:nvSpPr>
+          <p:cNvPr id="18" name="Shape 16"/>
+          <p:cNvSpPr/>
+          <p:nvPr/>
+        </p:nvSpPr>
+        <p:spPr>
+          <a:xfrm>
+            <a:off x="7875600" y="91440"/>
+            <a:ext cx="27432" cy="274320"/>
+          </a:xfrm>
+          <a:prstGeom prst="rect">
+            <a:avLst/>
+          </a:prstGeom>
+          <a:solidFill>
+            <a:srgbClr val="B45309"/>
+          </a:solidFill>
+          <a:ln w="12700">
+            <a:solidFill>
+              <a:srgbClr val="B45309"/>
+            </a:solidFill>
+            <a:prstDash val="solid"/>
+          </a:ln>
+        </p:spPr>
+      </p:sp>
+      <p:sp>
+        <p:nvSpPr>
+          <p:cNvPr id="19" name="Shape 17"/>
+          <p:cNvSpPr/>
+          <p:nvPr/>
+        </p:nvSpPr>
+        <p:spPr>
+          <a:xfrm>
+            <a:off x="7930464" y="91440"/>
+            <a:ext cx="27432" cy="274320"/>
+          </a:xfrm>
+          <a:prstGeom prst="rect">
+            <a:avLst/>
+          </a:prstGeom>
+          <a:solidFill>
+            <a:srgbClr val="B45309"/>
+          </a:solidFill>
+          <a:ln w="12700">
+            <a:solidFill>
+              <a:srgbClr val="B45309"/>
+            </a:solidFill>
+            <a:prstDash val="solid"/>
+          </a:ln>
+        </p:spPr>
+      </p:sp>
+      <p:pic>
+        <p:nvPicPr>
+          <p:cNvPr id="20" name="Image 0" descr="preencoded.png">    </p:cNvPr>
+          <p:cNvPicPr>
+            <a:picLocks noChangeAspect="1"/>
+          </p:cNvPicPr>
+          <p:nvPr/>
+        </p:nvPicPr>
+        <p:blipFill>
+          <a:blip r:embed="rId1"/>
+          <a:stretch>
+            <a:fillRect/>
+          </a:stretch>
+        </p:blipFill>
+        <p:spPr>
+          <a:xfrm>
+            <a:off x="8003616" y="128016"/>
+            <a:ext cx="201168" cy="201168"/>
+          </a:xfrm>
+          <a:prstGeom prst="rect">
+            <a:avLst/>
+          </a:prstGeom>
+        </p:spPr>
+      </p:pic>
+      <p:sp>
+        <p:nvSpPr>
+          <p:cNvPr id="21" name="Text 18"/>
+          <p:cNvSpPr txBox="1"/>
+          <p:nvPr/>
+        </p:nvSpPr>
+        <p:spPr>
+          <a:xfrm>
+            <a:off x="8259648" y="91440"/>
+            <a:ext cx="3346831" cy="274320"/>
+          </a:xfrm>
+          <a:prstGeom prst="rect">
+            <a:avLst/>
+          </a:prstGeom>
+          <a:noFill/>
+          <a:ln/>
+        </p:spPr>
+        <p:txBody>
+          <a:bodyPr wrap="square" lIns="0" tIns="0" rIns="0" bIns="0" rtlCol="0" anchor="ctr"/>
+          <a:lstStyle/>
+          <a:p>
+            <a:pPr indent="0" marL="0">
+              <a:buNone/>
+            </a:pPr>
+            <a:r>
+              <a:rPr lang="en-US" sz="1100" b="1" dirty="0">
+                <a:solidFill>
+                  <a:srgbClr val="92400E"/>
+                </a:solidFill>
+                <a:latin typeface="Calibri" pitchFamily="34" charset="0"/>
+                <a:ea typeface="Calibri" pitchFamily="34" charset="-122"/>
+                <a:cs typeface="Calibri" pitchFamily="34" charset="-120"/>
+              </a:rPr>
+              <a:t>DA UTILIZZARE OGGI</a:t>
+            </a:r>
+            <a:pPr indent="0" marL="0">
+              <a:buNone/>
+            </a:pPr>
+            <a:r>
+              <a:rPr lang="en-US" sz="1100" dirty="0">
+                <a:solidFill>
+                  <a:srgbClr val="92400E"/>
+                </a:solidFill>
+                <a:latin typeface="Calibri" pitchFamily="34" charset="0"/>
+                <a:ea typeface="Calibri" pitchFamily="34" charset="-122"/>
+                <a:cs typeface="Calibri" pitchFamily="34" charset="-120"/>
+              </a:rPr>
+              <a:t> · gli strumenti di PRG32</a:t>
             </a:r>
             <a:endParaRPr lang="en-US" sz="1100" dirty="0"/>
           </a:p>
@@ -7465,6 +8501,158 @@
       </p:graphicFrame>
       <p:sp>
         <p:nvSpPr>
+          <p:cNvPr id="4" name="Shape 1"/>
+          <p:cNvSpPr/>
+          <p:nvPr/>
+        </p:nvSpPr>
+        <p:spPr>
+          <a:xfrm>
+            <a:off x="7875600" y="91440"/>
+            <a:ext cx="3767455" cy="274320"/>
+          </a:xfrm>
+          <a:prstGeom prst="rect">
+            <a:avLst/>
+          </a:prstGeom>
+          <a:solidFill>
+            <a:srgbClr val="FEF3C7"/>
+          </a:solidFill>
+          <a:ln w="12700">
+            <a:solidFill>
+              <a:srgbClr val="B45309"/>
+            </a:solidFill>
+            <a:prstDash val="solid"/>
+          </a:ln>
+        </p:spPr>
+      </p:sp>
+      <p:sp>
+        <p:nvSpPr>
+          <p:cNvPr id="5" name="Shape 2"/>
+          <p:cNvSpPr/>
+          <p:nvPr/>
+        </p:nvSpPr>
+        <p:spPr>
+          <a:xfrm>
+            <a:off x="7875600" y="91440"/>
+            <a:ext cx="27432" cy="274320"/>
+          </a:xfrm>
+          <a:prstGeom prst="rect">
+            <a:avLst/>
+          </a:prstGeom>
+          <a:solidFill>
+            <a:srgbClr val="B45309"/>
+          </a:solidFill>
+          <a:ln w="12700">
+            <a:solidFill>
+              <a:srgbClr val="B45309"/>
+            </a:solidFill>
+            <a:prstDash val="solid"/>
+          </a:ln>
+        </p:spPr>
+      </p:sp>
+      <p:sp>
+        <p:nvSpPr>
+          <p:cNvPr id="6" name="Shape 3"/>
+          <p:cNvSpPr/>
+          <p:nvPr/>
+        </p:nvSpPr>
+        <p:spPr>
+          <a:xfrm>
+            <a:off x="7930464" y="91440"/>
+            <a:ext cx="27432" cy="274320"/>
+          </a:xfrm>
+          <a:prstGeom prst="rect">
+            <a:avLst/>
+          </a:prstGeom>
+          <a:solidFill>
+            <a:srgbClr val="B45309"/>
+          </a:solidFill>
+          <a:ln w="12700">
+            <a:solidFill>
+              <a:srgbClr val="B45309"/>
+            </a:solidFill>
+            <a:prstDash val="solid"/>
+          </a:ln>
+        </p:spPr>
+      </p:sp>
+      <p:pic>
+        <p:nvPicPr>
+          <p:cNvPr id="7" name="Image 0" descr="preencoded.png">    </p:cNvPr>
+          <p:cNvPicPr>
+            <a:picLocks noChangeAspect="1"/>
+          </p:cNvPicPr>
+          <p:nvPr/>
+        </p:nvPicPr>
+        <p:blipFill>
+          <a:blip r:embed="rId1"/>
+          <a:stretch>
+            <a:fillRect/>
+          </a:stretch>
+        </p:blipFill>
+        <p:spPr>
+          <a:xfrm>
+            <a:off x="8003616" y="128016"/>
+            <a:ext cx="201168" cy="201168"/>
+          </a:xfrm>
+          <a:prstGeom prst="rect">
+            <a:avLst/>
+          </a:prstGeom>
+        </p:spPr>
+      </p:pic>
+      <p:sp>
+        <p:nvSpPr>
+          <p:cNvPr id="8" name="Text 4"/>
+          <p:cNvSpPr txBox="1"/>
+          <p:nvPr/>
+        </p:nvSpPr>
+        <p:spPr>
+          <a:xfrm>
+            <a:off x="8259648" y="91440"/>
+            <a:ext cx="3346831" cy="274320"/>
+          </a:xfrm>
+          <a:prstGeom prst="rect">
+            <a:avLst/>
+          </a:prstGeom>
+          <a:noFill/>
+          <a:ln/>
+        </p:spPr>
+        <p:txBody>
+          <a:bodyPr wrap="square" lIns="0" tIns="0" rIns="0" bIns="0" rtlCol="0" anchor="ctr"/>
+          <a:lstStyle/>
+          <a:p>
+            <a:pPr indent="0" marL="0">
+              <a:buNone/>
+            </a:pPr>
+            <a:r>
+              <a:rPr lang="en-US" sz="1100" b="1" dirty="0">
+                <a:solidFill>
+                  <a:srgbClr val="92400E"/>
+                </a:solidFill>
+                <a:latin typeface="Calibri" pitchFamily="34" charset="0"/>
+                <a:ea typeface="Calibri" pitchFamily="34" charset="-122"/>
+                <a:cs typeface="Calibri" pitchFamily="34" charset="-120"/>
+              </a:rPr>
+              <a:t>DA UTILIZZARE OGGI</a:t>
+            </a:r>
+            <a:pPr indent="0" marL="0">
+              <a:buNone/>
+            </a:pPr>
+            <a:r>
+              <a:rPr lang="en-US" sz="1100" dirty="0">
+                <a:solidFill>
+                  <a:srgbClr val="92400E"/>
+                </a:solidFill>
+                <a:latin typeface="Calibri" pitchFamily="34" charset="0"/>
+                <a:ea typeface="Calibri" pitchFamily="34" charset="-122"/>
+                <a:cs typeface="Calibri" pitchFamily="34" charset="-120"/>
+              </a:rPr>
+              <a:t> · gli strumenti di PRG32</a:t>
+            </a:r>
+            <a:endParaRPr lang="en-US" sz="1100" dirty="0"/>
+          </a:p>
+        </p:txBody>
+      </p:sp>
+      <p:sp>
+        <p:nvSpPr>
           <p:cNvPr id="25" name="Slide Number Placeholder 0"/>
           <p:cNvSpPr>
             <a:spLocks noGrp="1"/>
@@ -9576,6 +10764,133 @@
       </p:sp>
       <p:sp>
         <p:nvSpPr>
+          <p:cNvPr id="17" name="Shape 15"/>
+          <p:cNvSpPr/>
+          <p:nvPr/>
+        </p:nvSpPr>
+        <p:spPr>
+          <a:xfrm>
+            <a:off x="8379917" y="91440"/>
+            <a:ext cx="3263138" cy="274320"/>
+          </a:xfrm>
+          <a:prstGeom prst="rect">
+            <a:avLst/>
+          </a:prstGeom>
+          <a:solidFill>
+            <a:srgbClr val="E0F2FE"/>
+          </a:solidFill>
+          <a:ln w="12700">
+            <a:solidFill>
+              <a:srgbClr val="0369A1"/>
+            </a:solidFill>
+            <a:prstDash val="solid"/>
+          </a:ln>
+        </p:spPr>
+      </p:sp>
+      <p:sp>
+        <p:nvSpPr>
+          <p:cNvPr id="18" name="Shape 16"/>
+          <p:cNvSpPr/>
+          <p:nvPr/>
+        </p:nvSpPr>
+        <p:spPr>
+          <a:xfrm>
+            <a:off x="8379917" y="91440"/>
+            <a:ext cx="73152" cy="274320"/>
+          </a:xfrm>
+          <a:prstGeom prst="rect">
+            <a:avLst/>
+          </a:prstGeom>
+          <a:solidFill>
+            <a:srgbClr val="0369A1"/>
+          </a:solidFill>
+          <a:ln w="12700">
+            <a:solidFill>
+              <a:srgbClr val="0369A1"/>
+            </a:solidFill>
+            <a:prstDash val="solid"/>
+          </a:ln>
+        </p:spPr>
+      </p:sp>
+      <p:pic>
+        <p:nvPicPr>
+          <p:cNvPr id="19" name="Image 0" descr="preencoded.png">    </p:cNvPr>
+          <p:cNvPicPr>
+            <a:picLocks noChangeAspect="1"/>
+          </p:cNvPicPr>
+          <p:nvPr/>
+        </p:nvPicPr>
+        <p:blipFill>
+          <a:blip r:embed="rId1"/>
+          <a:stretch>
+            <a:fillRect/>
+          </a:stretch>
+        </p:blipFill>
+        <p:spPr>
+          <a:xfrm>
+            <a:off x="8507933" y="128016"/>
+            <a:ext cx="201168" cy="201168"/>
+          </a:xfrm>
+          <a:prstGeom prst="rect">
+            <a:avLst/>
+          </a:prstGeom>
+        </p:spPr>
+      </p:pic>
+      <p:sp>
+        <p:nvSpPr>
+          <p:cNvPr id="20" name="Text 17"/>
+          <p:cNvSpPr txBox="1"/>
+          <p:nvPr/>
+        </p:nvSpPr>
+        <p:spPr>
+          <a:xfrm>
+            <a:off x="8763965" y="91440"/>
+            <a:ext cx="2842514" cy="274320"/>
+          </a:xfrm>
+          <a:prstGeom prst="rect">
+            <a:avLst/>
+          </a:prstGeom>
+          <a:noFill/>
+          <a:ln/>
+        </p:spPr>
+        <p:txBody>
+          <a:bodyPr wrap="square" lIns="0" tIns="0" rIns="0" bIns="0" rtlCol="0" anchor="ctr"/>
+          <a:lstStyle/>
+          <a:p>
+            <a:pPr indent="0" marL="0">
+              <a:buNone/>
+            </a:pPr>
+            <a:r>
+              <a:rPr lang="en-US" sz="1100" b="1" dirty="0">
+                <a:solidFill>
+                  <a:srgbClr val="075985"/>
+                </a:solidFill>
+                <a:latin typeface="Calibri" pitchFamily="34" charset="0"/>
+                <a:ea typeface="Calibri" pitchFamily="34" charset="-122"/>
+                <a:cs typeface="Calibri" pitchFamily="34" charset="-120"/>
+              </a:rPr>
+              <a:t>DA COMPRENDERE OGGI</a:t>
+            </a:r>
+            <a:pPr indent="0" marL="0">
+              <a:buNone/>
+            </a:pPr>
+            <a:r>
+              <a:rPr lang="en-US" sz="1100" dirty="0">
+                <a:solidFill>
+                  <a:srgbClr val="075985"/>
+                </a:solidFill>
+                <a:latin typeface="Calibri" pitchFamily="34" charset="0"/>
+                <a:ea typeface="Calibri" pitchFamily="34" charset="-122"/>
+                <a:cs typeface="Calibri" pitchFamily="34" charset="-120"/>
+              </a:rPr>
+              <a:t> · i multiplexer</a:t>
+            </a:r>
+            <a:endParaRPr lang="en-US" sz="1100" dirty="0"/>
+          </a:p>
+        </p:txBody>
+      </p:sp>
+      <p:sp>
+        <p:nvSpPr>
           <p:cNvPr id="25" name="Slide Number Placeholder 0"/>
           <p:cNvSpPr>
             <a:spLocks noGrp="1"/>
@@ -13367,6 +14682,133 @@
       </p:sp>
       <p:sp>
         <p:nvSpPr>
+          <p:cNvPr id="93" name="Shape 91"/>
+          <p:cNvSpPr/>
+          <p:nvPr/>
+        </p:nvSpPr>
+        <p:spPr>
+          <a:xfrm>
+            <a:off x="8051622" y="91440"/>
+            <a:ext cx="3591433" cy="274320"/>
+          </a:xfrm>
+          <a:prstGeom prst="rect">
+            <a:avLst/>
+          </a:prstGeom>
+          <a:solidFill>
+            <a:srgbClr val="E0F2FE"/>
+          </a:solidFill>
+          <a:ln w="12700">
+            <a:solidFill>
+              <a:srgbClr val="0369A1"/>
+            </a:solidFill>
+            <a:prstDash val="solid"/>
+          </a:ln>
+        </p:spPr>
+      </p:sp>
+      <p:sp>
+        <p:nvSpPr>
+          <p:cNvPr id="94" name="Shape 92"/>
+          <p:cNvSpPr/>
+          <p:nvPr/>
+        </p:nvSpPr>
+        <p:spPr>
+          <a:xfrm>
+            <a:off x="8051622" y="91440"/>
+            <a:ext cx="73152" cy="274320"/>
+          </a:xfrm>
+          <a:prstGeom prst="rect">
+            <a:avLst/>
+          </a:prstGeom>
+          <a:solidFill>
+            <a:srgbClr val="0369A1"/>
+          </a:solidFill>
+          <a:ln w="12700">
+            <a:solidFill>
+              <a:srgbClr val="0369A1"/>
+            </a:solidFill>
+            <a:prstDash val="solid"/>
+          </a:ln>
+        </p:spPr>
+      </p:sp>
+      <p:pic>
+        <p:nvPicPr>
+          <p:cNvPr id="95" name="Image 0" descr="preencoded.png">    </p:cNvPr>
+          <p:cNvPicPr>
+            <a:picLocks noChangeAspect="1"/>
+          </p:cNvPicPr>
+          <p:nvPr/>
+        </p:nvPicPr>
+        <p:blipFill>
+          <a:blip r:embed="rId1"/>
+          <a:stretch>
+            <a:fillRect/>
+          </a:stretch>
+        </p:blipFill>
+        <p:spPr>
+          <a:xfrm>
+            <a:off x="8179638" y="128016"/>
+            <a:ext cx="201168" cy="201168"/>
+          </a:xfrm>
+          <a:prstGeom prst="rect">
+            <a:avLst/>
+          </a:prstGeom>
+        </p:spPr>
+      </p:pic>
+      <p:sp>
+        <p:nvSpPr>
+          <p:cNvPr id="96" name="Text 93"/>
+          <p:cNvSpPr txBox="1"/>
+          <p:nvPr/>
+        </p:nvSpPr>
+        <p:spPr>
+          <a:xfrm>
+            <a:off x="8435670" y="91440"/>
+            <a:ext cx="3170809" cy="274320"/>
+          </a:xfrm>
+          <a:prstGeom prst="rect">
+            <a:avLst/>
+          </a:prstGeom>
+          <a:noFill/>
+          <a:ln/>
+        </p:spPr>
+        <p:txBody>
+          <a:bodyPr wrap="square" lIns="0" tIns="0" rIns="0" bIns="0" rtlCol="0" anchor="ctr"/>
+          <a:lstStyle/>
+          <a:p>
+            <a:pPr indent="0" marL="0">
+              <a:buNone/>
+            </a:pPr>
+            <a:r>
+              <a:rPr lang="en-US" sz="1100" b="1" dirty="0">
+                <a:solidFill>
+                  <a:srgbClr val="075985"/>
+                </a:solidFill>
+                <a:latin typeface="Calibri" pitchFamily="34" charset="0"/>
+                <a:ea typeface="Calibri" pitchFamily="34" charset="-122"/>
+                <a:cs typeface="Calibri" pitchFamily="34" charset="-120"/>
+              </a:rPr>
+              <a:t>DA COMPRENDERE OGGI</a:t>
+            </a:r>
+            <a:pPr indent="0" marL="0">
+              <a:buNone/>
+            </a:pPr>
+            <a:r>
+              <a:rPr lang="en-US" sz="1100" dirty="0">
+                <a:solidFill>
+                  <a:srgbClr val="075985"/>
+                </a:solidFill>
+                <a:latin typeface="Calibri" pitchFamily="34" charset="0"/>
+                <a:ea typeface="Calibri" pitchFamily="34" charset="-122"/>
+                <a:cs typeface="Calibri" pitchFamily="34" charset="-120"/>
+              </a:rPr>
+              <a:t> · decoder ed encoder</a:t>
+            </a:r>
+            <a:endParaRPr lang="en-US" sz="1100" dirty="0"/>
+          </a:p>
+        </p:txBody>
+      </p:sp>
+      <p:sp>
+        <p:nvSpPr>
           <p:cNvPr id="25" name="Slide Number Placeholder 0"/>
           <p:cNvSpPr>
             <a:spLocks noGrp="1"/>
@@ -14413,6 +15855,133 @@
       </p:sp>
       <p:sp>
         <p:nvSpPr>
+          <p:cNvPr id="28" name="Shape 26"/>
+          <p:cNvSpPr/>
+          <p:nvPr/>
+        </p:nvSpPr>
+        <p:spPr>
+          <a:xfrm>
+            <a:off x="8379917" y="91440"/>
+            <a:ext cx="3263138" cy="274320"/>
+          </a:xfrm>
+          <a:prstGeom prst="rect">
+            <a:avLst/>
+          </a:prstGeom>
+          <a:solidFill>
+            <a:srgbClr val="E0F2FE"/>
+          </a:solidFill>
+          <a:ln w="12700">
+            <a:solidFill>
+              <a:srgbClr val="0369A1"/>
+            </a:solidFill>
+            <a:prstDash val="solid"/>
+          </a:ln>
+        </p:spPr>
+      </p:sp>
+      <p:sp>
+        <p:nvSpPr>
+          <p:cNvPr id="29" name="Shape 27"/>
+          <p:cNvSpPr/>
+          <p:nvPr/>
+        </p:nvSpPr>
+        <p:spPr>
+          <a:xfrm>
+            <a:off x="8379917" y="91440"/>
+            <a:ext cx="73152" cy="274320"/>
+          </a:xfrm>
+          <a:prstGeom prst="rect">
+            <a:avLst/>
+          </a:prstGeom>
+          <a:solidFill>
+            <a:srgbClr val="0369A1"/>
+          </a:solidFill>
+          <a:ln w="12700">
+            <a:solidFill>
+              <a:srgbClr val="0369A1"/>
+            </a:solidFill>
+            <a:prstDash val="solid"/>
+          </a:ln>
+        </p:spPr>
+      </p:sp>
+      <p:pic>
+        <p:nvPicPr>
+          <p:cNvPr id="30" name="Image 0" descr="preencoded.png">    </p:cNvPr>
+          <p:cNvPicPr>
+            <a:picLocks noChangeAspect="1"/>
+          </p:cNvPicPr>
+          <p:nvPr/>
+        </p:nvPicPr>
+        <p:blipFill>
+          <a:blip r:embed="rId1"/>
+          <a:stretch>
+            <a:fillRect/>
+          </a:stretch>
+        </p:blipFill>
+        <p:spPr>
+          <a:xfrm>
+            <a:off x="8507933" y="128016"/>
+            <a:ext cx="201168" cy="201168"/>
+          </a:xfrm>
+          <a:prstGeom prst="rect">
+            <a:avLst/>
+          </a:prstGeom>
+        </p:spPr>
+      </p:pic>
+      <p:sp>
+        <p:nvSpPr>
+          <p:cNvPr id="31" name="Text 28"/>
+          <p:cNvSpPr txBox="1"/>
+          <p:nvPr/>
+        </p:nvSpPr>
+        <p:spPr>
+          <a:xfrm>
+            <a:off x="8763965" y="91440"/>
+            <a:ext cx="2842514" cy="274320"/>
+          </a:xfrm>
+          <a:prstGeom prst="rect">
+            <a:avLst/>
+          </a:prstGeom>
+          <a:noFill/>
+          <a:ln/>
+        </p:spPr>
+        <p:txBody>
+          <a:bodyPr wrap="square" lIns="0" tIns="0" rIns="0" bIns="0" rtlCol="0" anchor="ctr"/>
+          <a:lstStyle/>
+          <a:p>
+            <a:pPr indent="0" marL="0">
+              <a:buNone/>
+            </a:pPr>
+            <a:r>
+              <a:rPr lang="en-US" sz="1100" b="1" dirty="0">
+                <a:solidFill>
+                  <a:srgbClr val="075985"/>
+                </a:solidFill>
+                <a:latin typeface="Calibri" pitchFamily="34" charset="0"/>
+                <a:ea typeface="Calibri" pitchFamily="34" charset="-122"/>
+                <a:cs typeface="Calibri" pitchFamily="34" charset="-120"/>
+              </a:rPr>
+              <a:t>DA COMPRENDERE OGGI</a:t>
+            </a:r>
+            <a:pPr indent="0" marL="0">
+              <a:buNone/>
+            </a:pPr>
+            <a:r>
+              <a:rPr lang="en-US" sz="1100" dirty="0">
+                <a:solidFill>
+                  <a:srgbClr val="075985"/>
+                </a:solidFill>
+                <a:latin typeface="Calibri" pitchFamily="34" charset="0"/>
+                <a:ea typeface="Calibri" pitchFamily="34" charset="-122"/>
+                <a:cs typeface="Calibri" pitchFamily="34" charset="-120"/>
+              </a:rPr>
+              <a:t> · i multiplexer</a:t>
+            </a:r>
+            <a:endParaRPr lang="en-US" sz="1100" dirty="0"/>
+          </a:p>
+        </p:txBody>
+      </p:sp>
+      <p:sp>
+        <p:nvSpPr>
           <p:cNvPr id="25" name="Slide Number Placeholder 0"/>
           <p:cNvSpPr>
             <a:spLocks noGrp="1"/>
@@ -15119,6 +16688,133 @@
               <a:t>Lo stesso valore accodato al byte ne rende pari la parità totale</a:t>
             </a:r>
             <a:endParaRPr lang="en-US" sz="1700" dirty="0"/>
+          </a:p>
+        </p:txBody>
+      </p:sp>
+      <p:sp>
+        <p:nvSpPr>
+          <p:cNvPr id="14" name="Shape 12"/>
+          <p:cNvSpPr/>
+          <p:nvPr/>
+        </p:nvSpPr>
+        <p:spPr>
+          <a:xfrm>
+            <a:off x="7920304" y="91440"/>
+            <a:ext cx="3722751" cy="274320"/>
+          </a:xfrm>
+          <a:prstGeom prst="rect">
+            <a:avLst/>
+          </a:prstGeom>
+          <a:solidFill>
+            <a:srgbClr val="E0F2FE"/>
+          </a:solidFill>
+          <a:ln w="12700">
+            <a:solidFill>
+              <a:srgbClr val="0369A1"/>
+            </a:solidFill>
+            <a:prstDash val="solid"/>
+          </a:ln>
+        </p:spPr>
+      </p:sp>
+      <p:sp>
+        <p:nvSpPr>
+          <p:cNvPr id="15" name="Shape 13"/>
+          <p:cNvSpPr/>
+          <p:nvPr/>
+        </p:nvSpPr>
+        <p:spPr>
+          <a:xfrm>
+            <a:off x="7920304" y="91440"/>
+            <a:ext cx="73152" cy="274320"/>
+          </a:xfrm>
+          <a:prstGeom prst="rect">
+            <a:avLst/>
+          </a:prstGeom>
+          <a:solidFill>
+            <a:srgbClr val="0369A1"/>
+          </a:solidFill>
+          <a:ln w="12700">
+            <a:solidFill>
+              <a:srgbClr val="0369A1"/>
+            </a:solidFill>
+            <a:prstDash val="solid"/>
+          </a:ln>
+        </p:spPr>
+      </p:sp>
+      <p:pic>
+        <p:nvPicPr>
+          <p:cNvPr id="16" name="Image 0" descr="preencoded.png">    </p:cNvPr>
+          <p:cNvPicPr>
+            <a:picLocks noChangeAspect="1"/>
+          </p:cNvPicPr>
+          <p:nvPr/>
+        </p:nvPicPr>
+        <p:blipFill>
+          <a:blip r:embed="rId1"/>
+          <a:stretch>
+            <a:fillRect/>
+          </a:stretch>
+        </p:blipFill>
+        <p:spPr>
+          <a:xfrm>
+            <a:off x="8048320" y="128016"/>
+            <a:ext cx="201168" cy="201168"/>
+          </a:xfrm>
+          <a:prstGeom prst="rect">
+            <a:avLst/>
+          </a:prstGeom>
+        </p:spPr>
+      </p:pic>
+      <p:sp>
+        <p:nvSpPr>
+          <p:cNvPr id="17" name="Text 14"/>
+          <p:cNvSpPr txBox="1"/>
+          <p:nvPr/>
+        </p:nvSpPr>
+        <p:spPr>
+          <a:xfrm>
+            <a:off x="8304352" y="91440"/>
+            <a:ext cx="3302127" cy="274320"/>
+          </a:xfrm>
+          <a:prstGeom prst="rect">
+            <a:avLst/>
+          </a:prstGeom>
+          <a:noFill/>
+          <a:ln/>
+        </p:spPr>
+        <p:txBody>
+          <a:bodyPr wrap="square" lIns="0" tIns="0" rIns="0" bIns="0" rtlCol="0" anchor="ctr"/>
+          <a:lstStyle/>
+          <a:p>
+            <a:pPr indent="0" marL="0">
+              <a:buNone/>
+            </a:pPr>
+            <a:r>
+              <a:rPr lang="en-US" sz="1100" b="1" dirty="0">
+                <a:solidFill>
+                  <a:srgbClr val="075985"/>
+                </a:solidFill>
+                <a:latin typeface="Calibri" pitchFamily="34" charset="0"/>
+                <a:ea typeface="Calibri" pitchFamily="34" charset="-122"/>
+                <a:cs typeface="Calibri" pitchFamily="34" charset="-120"/>
+              </a:rPr>
+              <a:t>DA COMPRENDERE OGGI</a:t>
+            </a:r>
+            <a:pPr indent="0" marL="0">
+              <a:buNone/>
+            </a:pPr>
+            <a:r>
+              <a:rPr lang="en-US" sz="1100" dirty="0">
+                <a:solidFill>
+                  <a:srgbClr val="075985"/>
+                </a:solidFill>
+                <a:latin typeface="Calibri" pitchFamily="34" charset="0"/>
+                <a:ea typeface="Calibri" pitchFamily="34" charset="-122"/>
+                <a:cs typeface="Calibri" pitchFamily="34" charset="-120"/>
+              </a:rPr>
+              <a:t> · comparatori e parità</a:t>
+            </a:r>
+            <a:endParaRPr lang="en-US" sz="1100" dirty="0"/>
           </a:p>
         </p:txBody>
       </p:sp>
@@ -17501,6 +19197,133 @@
       </p:sp>
       <p:sp>
         <p:nvSpPr>
+          <p:cNvPr id="5" name="Shape 2"/>
+          <p:cNvSpPr/>
+          <p:nvPr/>
+        </p:nvSpPr>
+        <p:spPr>
+          <a:xfrm>
+            <a:off x="8905189" y="91440"/>
+            <a:ext cx="2737866" cy="274320"/>
+          </a:xfrm>
+          <a:prstGeom prst="rect">
+            <a:avLst/>
+          </a:prstGeom>
+          <a:solidFill>
+            <a:srgbClr val="E0F2FE"/>
+          </a:solidFill>
+          <a:ln w="12700">
+            <a:solidFill>
+              <a:srgbClr val="0369A1"/>
+            </a:solidFill>
+            <a:prstDash val="solid"/>
+          </a:ln>
+        </p:spPr>
+      </p:sp>
+      <p:sp>
+        <p:nvSpPr>
+          <p:cNvPr id="6" name="Shape 3"/>
+          <p:cNvSpPr/>
+          <p:nvPr/>
+        </p:nvSpPr>
+        <p:spPr>
+          <a:xfrm>
+            <a:off x="8905189" y="91440"/>
+            <a:ext cx="73152" cy="274320"/>
+          </a:xfrm>
+          <a:prstGeom prst="rect">
+            <a:avLst/>
+          </a:prstGeom>
+          <a:solidFill>
+            <a:srgbClr val="0369A1"/>
+          </a:solidFill>
+          <a:ln w="12700">
+            <a:solidFill>
+              <a:srgbClr val="0369A1"/>
+            </a:solidFill>
+            <a:prstDash val="solid"/>
+          </a:ln>
+        </p:spPr>
+      </p:sp>
+      <p:pic>
+        <p:nvPicPr>
+          <p:cNvPr id="7" name="Image 0" descr="preencoded.png">    </p:cNvPr>
+          <p:cNvPicPr>
+            <a:picLocks noChangeAspect="1"/>
+          </p:cNvPicPr>
+          <p:nvPr/>
+        </p:nvPicPr>
+        <p:blipFill>
+          <a:blip r:embed="rId1"/>
+          <a:stretch>
+            <a:fillRect/>
+          </a:stretch>
+        </p:blipFill>
+        <p:spPr>
+          <a:xfrm>
+            <a:off x="9033205" y="128016"/>
+            <a:ext cx="201168" cy="201168"/>
+          </a:xfrm>
+          <a:prstGeom prst="rect">
+            <a:avLst/>
+          </a:prstGeom>
+        </p:spPr>
+      </p:pic>
+      <p:sp>
+        <p:nvSpPr>
+          <p:cNvPr id="8" name="Text 4"/>
+          <p:cNvSpPr txBox="1"/>
+          <p:nvPr/>
+        </p:nvSpPr>
+        <p:spPr>
+          <a:xfrm>
+            <a:off x="9289237" y="91440"/>
+            <a:ext cx="2317242" cy="274320"/>
+          </a:xfrm>
+          <a:prstGeom prst="rect">
+            <a:avLst/>
+          </a:prstGeom>
+          <a:noFill/>
+          <a:ln/>
+        </p:spPr>
+        <p:txBody>
+          <a:bodyPr wrap="square" lIns="0" tIns="0" rIns="0" bIns="0" rtlCol="0" anchor="ctr"/>
+          <a:lstStyle/>
+          <a:p>
+            <a:pPr indent="0" marL="0">
+              <a:buNone/>
+            </a:pPr>
+            <a:r>
+              <a:rPr lang="en-US" sz="1100" b="1" dirty="0">
+                <a:solidFill>
+                  <a:srgbClr val="075985"/>
+                </a:solidFill>
+                <a:latin typeface="Calibri" pitchFamily="34" charset="0"/>
+                <a:ea typeface="Calibri" pitchFamily="34" charset="-122"/>
+                <a:cs typeface="Calibri" pitchFamily="34" charset="-120"/>
+              </a:rPr>
+              <a:t>DA COMPRENDERE OGGI</a:t>
+            </a:r>
+            <a:pPr indent="0" marL="0">
+              <a:buNone/>
+            </a:pPr>
+            <a:r>
+              <a:rPr lang="en-US" sz="1100" dirty="0">
+                <a:solidFill>
+                  <a:srgbClr val="075985"/>
+                </a:solidFill>
+                <a:latin typeface="Calibri" pitchFamily="34" charset="0"/>
+                <a:ea typeface="Calibri" pitchFamily="34" charset="-122"/>
+                <a:cs typeface="Calibri" pitchFamily="34" charset="-120"/>
+              </a:rPr>
+              <a:t> · l'ALU</a:t>
+            </a:r>
+            <a:endParaRPr lang="en-US" sz="1100" dirty="0"/>
+          </a:p>
+        </p:txBody>
+      </p:sp>
+      <p:sp>
+        <p:nvSpPr>
           <p:cNvPr id="25" name="Slide Number Placeholder 0"/>
           <p:cNvSpPr>
             <a:spLocks noGrp="1"/>
@@ -17987,6 +19810,158 @@
       </p:sp>
       <p:sp>
         <p:nvSpPr>
+          <p:cNvPr id="5" name="Shape 3"/>
+          <p:cNvSpPr/>
+          <p:nvPr/>
+        </p:nvSpPr>
+        <p:spPr>
+          <a:xfrm>
+            <a:off x="7941259" y="91440"/>
+            <a:ext cx="3701796" cy="274320"/>
+          </a:xfrm>
+          <a:prstGeom prst="rect">
+            <a:avLst/>
+          </a:prstGeom>
+          <a:solidFill>
+            <a:srgbClr val="FEF3C7"/>
+          </a:solidFill>
+          <a:ln w="12700">
+            <a:solidFill>
+              <a:srgbClr val="B45309"/>
+            </a:solidFill>
+            <a:prstDash val="solid"/>
+          </a:ln>
+        </p:spPr>
+      </p:sp>
+      <p:sp>
+        <p:nvSpPr>
+          <p:cNvPr id="6" name="Shape 4"/>
+          <p:cNvSpPr/>
+          <p:nvPr/>
+        </p:nvSpPr>
+        <p:spPr>
+          <a:xfrm>
+            <a:off x="7941259" y="91440"/>
+            <a:ext cx="27432" cy="274320"/>
+          </a:xfrm>
+          <a:prstGeom prst="rect">
+            <a:avLst/>
+          </a:prstGeom>
+          <a:solidFill>
+            <a:srgbClr val="B45309"/>
+          </a:solidFill>
+          <a:ln w="12700">
+            <a:solidFill>
+              <a:srgbClr val="B45309"/>
+            </a:solidFill>
+            <a:prstDash val="solid"/>
+          </a:ln>
+        </p:spPr>
+      </p:sp>
+      <p:sp>
+        <p:nvSpPr>
+          <p:cNvPr id="7" name="Shape 5"/>
+          <p:cNvSpPr/>
+          <p:nvPr/>
+        </p:nvSpPr>
+        <p:spPr>
+          <a:xfrm>
+            <a:off x="7996123" y="91440"/>
+            <a:ext cx="27432" cy="274320"/>
+          </a:xfrm>
+          <a:prstGeom prst="rect">
+            <a:avLst/>
+          </a:prstGeom>
+          <a:solidFill>
+            <a:srgbClr val="B45309"/>
+          </a:solidFill>
+          <a:ln w="12700">
+            <a:solidFill>
+              <a:srgbClr val="B45309"/>
+            </a:solidFill>
+            <a:prstDash val="solid"/>
+          </a:ln>
+        </p:spPr>
+      </p:sp>
+      <p:pic>
+        <p:nvPicPr>
+          <p:cNvPr id="8" name="Image 0" descr="preencoded.png">    </p:cNvPr>
+          <p:cNvPicPr>
+            <a:picLocks noChangeAspect="1"/>
+          </p:cNvPicPr>
+          <p:nvPr/>
+        </p:nvPicPr>
+        <p:blipFill>
+          <a:blip r:embed="rId1"/>
+          <a:stretch>
+            <a:fillRect/>
+          </a:stretch>
+        </p:blipFill>
+        <p:spPr>
+          <a:xfrm>
+            <a:off x="8069275" y="128016"/>
+            <a:ext cx="201168" cy="201168"/>
+          </a:xfrm>
+          <a:prstGeom prst="rect">
+            <a:avLst/>
+          </a:prstGeom>
+        </p:spPr>
+      </p:pic>
+      <p:sp>
+        <p:nvSpPr>
+          <p:cNvPr id="9" name="Text 6"/>
+          <p:cNvSpPr txBox="1"/>
+          <p:nvPr/>
+        </p:nvSpPr>
+        <p:spPr>
+          <a:xfrm>
+            <a:off x="8325307" y="91440"/>
+            <a:ext cx="3281172" cy="274320"/>
+          </a:xfrm>
+          <a:prstGeom prst="rect">
+            <a:avLst/>
+          </a:prstGeom>
+          <a:noFill/>
+          <a:ln/>
+        </p:spPr>
+        <p:txBody>
+          <a:bodyPr wrap="square" lIns="0" tIns="0" rIns="0" bIns="0" rtlCol="0" anchor="ctr"/>
+          <a:lstStyle/>
+          <a:p>
+            <a:pPr indent="0" marL="0">
+              <a:buNone/>
+            </a:pPr>
+            <a:r>
+              <a:rPr lang="en-US" sz="1100" b="1" dirty="0">
+                <a:solidFill>
+                  <a:srgbClr val="92400E"/>
+                </a:solidFill>
+                <a:latin typeface="Calibri" pitchFamily="34" charset="0"/>
+                <a:ea typeface="Calibri" pitchFamily="34" charset="-122"/>
+                <a:cs typeface="Calibri" pitchFamily="34" charset="-120"/>
+              </a:rPr>
+              <a:t>DA UTILIZZARE OGGI</a:t>
+            </a:r>
+            <a:pPr indent="0" marL="0">
+              <a:buNone/>
+            </a:pPr>
+            <a:r>
+              <a:rPr lang="en-US" sz="1100" dirty="0">
+                <a:solidFill>
+                  <a:srgbClr val="92400E"/>
+                </a:solidFill>
+                <a:latin typeface="Calibri" pitchFamily="34" charset="0"/>
+                <a:ea typeface="Calibri" pitchFamily="34" charset="-122"/>
+                <a:cs typeface="Calibri" pitchFamily="34" charset="-120"/>
+              </a:rPr>
+              <a:t> · il programma completo</a:t>
+            </a:r>
+            <a:endParaRPr lang="en-US" sz="1100" dirty="0"/>
+          </a:p>
+        </p:txBody>
+      </p:sp>
+      <p:sp>
+        <p:nvSpPr>
           <p:cNvPr id="25" name="Slide Number Placeholder 0"/>
           <p:cNvSpPr>
             <a:spLocks noGrp="1"/>
@@ -18651,6 +20626,158 @@
               <a:t>    lw   ra, 12(sp)</a:t>
             </a:r>
             <a:endParaRPr lang="en-US" sz="1200" dirty="0"/>
+          </a:p>
+        </p:txBody>
+      </p:sp>
+      <p:sp>
+        <p:nvSpPr>
+          <p:cNvPr id="5" name="Shape 3"/>
+          <p:cNvSpPr/>
+          <p:nvPr/>
+        </p:nvSpPr>
+        <p:spPr>
+          <a:xfrm>
+            <a:off x="7941259" y="91440"/>
+            <a:ext cx="3701796" cy="274320"/>
+          </a:xfrm>
+          <a:prstGeom prst="rect">
+            <a:avLst/>
+          </a:prstGeom>
+          <a:solidFill>
+            <a:srgbClr val="FEF3C7"/>
+          </a:solidFill>
+          <a:ln w="12700">
+            <a:solidFill>
+              <a:srgbClr val="B45309"/>
+            </a:solidFill>
+            <a:prstDash val="solid"/>
+          </a:ln>
+        </p:spPr>
+      </p:sp>
+      <p:sp>
+        <p:nvSpPr>
+          <p:cNvPr id="6" name="Shape 4"/>
+          <p:cNvSpPr/>
+          <p:nvPr/>
+        </p:nvSpPr>
+        <p:spPr>
+          <a:xfrm>
+            <a:off x="7941259" y="91440"/>
+            <a:ext cx="27432" cy="274320"/>
+          </a:xfrm>
+          <a:prstGeom prst="rect">
+            <a:avLst/>
+          </a:prstGeom>
+          <a:solidFill>
+            <a:srgbClr val="B45309"/>
+          </a:solidFill>
+          <a:ln w="12700">
+            <a:solidFill>
+              <a:srgbClr val="B45309"/>
+            </a:solidFill>
+            <a:prstDash val="solid"/>
+          </a:ln>
+        </p:spPr>
+      </p:sp>
+      <p:sp>
+        <p:nvSpPr>
+          <p:cNvPr id="7" name="Shape 5"/>
+          <p:cNvSpPr/>
+          <p:nvPr/>
+        </p:nvSpPr>
+        <p:spPr>
+          <a:xfrm>
+            <a:off x="7996123" y="91440"/>
+            <a:ext cx="27432" cy="274320"/>
+          </a:xfrm>
+          <a:prstGeom prst="rect">
+            <a:avLst/>
+          </a:prstGeom>
+          <a:solidFill>
+            <a:srgbClr val="B45309"/>
+          </a:solidFill>
+          <a:ln w="12700">
+            <a:solidFill>
+              <a:srgbClr val="B45309"/>
+            </a:solidFill>
+            <a:prstDash val="solid"/>
+          </a:ln>
+        </p:spPr>
+      </p:sp>
+      <p:pic>
+        <p:nvPicPr>
+          <p:cNvPr id="8" name="Image 0" descr="preencoded.png">    </p:cNvPr>
+          <p:cNvPicPr>
+            <a:picLocks noChangeAspect="1"/>
+          </p:cNvPicPr>
+          <p:nvPr/>
+        </p:nvPicPr>
+        <p:blipFill>
+          <a:blip r:embed="rId1"/>
+          <a:stretch>
+            <a:fillRect/>
+          </a:stretch>
+        </p:blipFill>
+        <p:spPr>
+          <a:xfrm>
+            <a:off x="8069275" y="128016"/>
+            <a:ext cx="201168" cy="201168"/>
+          </a:xfrm>
+          <a:prstGeom prst="rect">
+            <a:avLst/>
+          </a:prstGeom>
+        </p:spPr>
+      </p:pic>
+      <p:sp>
+        <p:nvSpPr>
+          <p:cNvPr id="9" name="Text 6"/>
+          <p:cNvSpPr txBox="1"/>
+          <p:nvPr/>
+        </p:nvSpPr>
+        <p:spPr>
+          <a:xfrm>
+            <a:off x="8325307" y="91440"/>
+            <a:ext cx="3281172" cy="274320"/>
+          </a:xfrm>
+          <a:prstGeom prst="rect">
+            <a:avLst/>
+          </a:prstGeom>
+          <a:noFill/>
+          <a:ln/>
+        </p:spPr>
+        <p:txBody>
+          <a:bodyPr wrap="square" lIns="0" tIns="0" rIns="0" bIns="0" rtlCol="0" anchor="ctr"/>
+          <a:lstStyle/>
+          <a:p>
+            <a:pPr indent="0" marL="0">
+              <a:buNone/>
+            </a:pPr>
+            <a:r>
+              <a:rPr lang="en-US" sz="1100" b="1" dirty="0">
+                <a:solidFill>
+                  <a:srgbClr val="92400E"/>
+                </a:solidFill>
+                <a:latin typeface="Calibri" pitchFamily="34" charset="0"/>
+                <a:ea typeface="Calibri" pitchFamily="34" charset="-122"/>
+                <a:cs typeface="Calibri" pitchFamily="34" charset="-120"/>
+              </a:rPr>
+              <a:t>DA UTILIZZARE OGGI</a:t>
+            </a:r>
+            <a:pPr indent="0" marL="0">
+              <a:buNone/>
+            </a:pPr>
+            <a:r>
+              <a:rPr lang="en-US" sz="1100" dirty="0">
+                <a:solidFill>
+                  <a:srgbClr val="92400E"/>
+                </a:solidFill>
+                <a:latin typeface="Calibri" pitchFamily="34" charset="0"/>
+                <a:ea typeface="Calibri" pitchFamily="34" charset="-122"/>
+                <a:cs typeface="Calibri" pitchFamily="34" charset="-120"/>
+              </a:rPr>
+              <a:t> · il programma completo</a:t>
+            </a:r>
+            <a:endParaRPr lang="en-US" sz="1100" dirty="0"/>
           </a:p>
         </p:txBody>
       </p:sp>

--- a/it/slides/11-Architettura_dei_Calcolatori-Macchine_Combinatorie-Codice.pptx
+++ b/it/slides/11-Architettura_dei_Calcolatori-Macchine_Combinatorie-Codice.pptx
@@ -122,45 +122,45 @@
   <p:extLst>
     <p:ext uri="{521415D9-36F7-43E2-AB2F-B90AF26B5E84}">
       <p14:sectionLst xmlns:p14="http://schemas.microsoft.com/office/powerpoint/2010/main">
-        <p14:section name="Apertura" id="{6b40d5eb-6250-e92d-edb1-89038c6dcf3f}">
+        <p14:section name="Apertura" id="{3b0c6fc6-dc08-1784-ccbb-4dbfe5b30b5a}">
           <p14:sldIdLst>
             <p14:sldId id="256"/>
             <p14:sldId id="257"/>
           </p14:sldIdLst>
         </p14:section>
-        <p14:section name="Riscaldamento sulla macchina" id="{d6c53d64-5ef4-039a-049f-9cebc4ca4e59}">
+        <p14:section name="Riscaldamento sulla macchina" id="{d9812c6c-aad0-09ff-3486-3fe37bf0c8c1}">
           <p14:sldIdLst>
             <p14:sldId id="258"/>
           </p14:sldIdLst>
         </p14:section>
-        <p14:section name="Decodificatori e codificatori" id="{4fb42383-3d02-aa1e-3ecb-a2caaa4ad4ae}">
+        <p14:section name="Decodificatori e codificatori" id="{11fa296b-80ed-9ba4-9f80-00f0ec47a562}">
           <p14:sldIdLst>
             <p14:sldId id="259"/>
           </p14:sldIdLst>
         </p14:section>
-        <p14:section name="Multiplexer e demultiplexer" id="{6994a41d-c5b0-25a8-3c2c-c1e5fcebe201}">
+        <p14:section name="Multiplexer e demultiplexer" id="{644ded7e-9d2f-0c95-41e3-109e57d627d8}">
           <p14:sldIdLst>
             <p14:sldId id="260"/>
           </p14:sldIdLst>
         </p14:section>
-        <p14:section name="Confrontare e controllare" id="{554c6388-cdb8-0c74-4975-29e0eee8f726}">
+        <p14:section name="Confrontare e controllare" id="{e8f37ee5-54ba-c9b3-6a22-8d6790732146}">
           <p14:sldIdLst>
             <p14:sldId id="261"/>
           </p14:sldIdLst>
         </p14:section>
-        <p14:section name="L'unità aritmetico-logica" id="{f8cba2b6-7790-7513-edd0-9a9cc7417c4c}">
+        <p14:section name="L'unità aritmetico-logica" id="{6c934318-3939-1742-09e0-0e75a97a3fa3}">
           <p14:sldIdLst>
             <p14:sldId id="262"/>
           </p14:sldIdLst>
         </p14:section>
-        <p14:section name="Il programma completo" id="{e65b51a9-4e94-1c16-db50-8f867eac8c91}">
+        <p14:section name="Il programma completo" id="{eb461f55-cc5e-63c3-39b3-9b2767be2c3c}">
           <p14:sldIdLst>
             <p14:sldId id="263"/>
             <p14:sldId id="264"/>
             <p14:sldId id="265"/>
           </p14:sldIdLst>
         </p14:section>
-        <p14:section name="Eseguire e provare" id="{18fa7a9d-a9c3-6e2a-cecb-690c97bfa656}">
+        <p14:section name="Eseguire e provare" id="{3ae0e679-f26f-848b-920f-1c0a424fc835}">
           <p14:sldIdLst>
             <p14:sldId id="266"/>
             <p14:sldId id="267"/>
@@ -169,7 +169,7 @@
             <p14:sldId id="270"/>
           </p14:sldIdLst>
         </p14:section>
-        <p14:section name="Esercizi" id="{1d7cbdca-d8d5-b743-8a73-5a5f5d428a61}">
+        <p14:section name="Esercizi" id="{4c7daeec-56a9-345f-4fa0-79dc40b57409}">
           <p14:sldIdLst>
             <p14:sldId id="271"/>
           </p14:sldIdLst>
